--- a/output_pptx/It_Is_Well_With_My_Soul.pptx
+++ b/output_pptx/It_Is_Well_With_My_Soul.pptx
@@ -3122,23 +3122,23 @@
         </p:nvSpPr>
         <p:spPr>
           <a:xfrm>
-            <a:off x="594360" y="1837944"/>
-            <a:ext cx="11002975" cy="685800"/>
-          </a:xfrm>
-          <a:prstGeom prst="rect">
-            <a:avLst/>
-          </a:prstGeom>
-          <a:noFill/>
-        </p:spPr>
-        <p:txBody>
-          <a:bodyPr wrap="square">
-            <a:spAutoFit/>
-          </a:bodyPr>
-          <a:lstStyle/>
-          <a:p>
-            <a:pPr algn="ctr"/>
-            <a:r>
-              <a:rPr sz="4400" b="1" i="0">
+            <a:off x="640080" y="1650492"/>
+            <a:ext cx="10911535" cy="731520"/>
+          </a:xfrm>
+          <a:prstGeom prst="rect">
+            <a:avLst/>
+          </a:prstGeom>
+          <a:noFill/>
+        </p:spPr>
+        <p:txBody>
+          <a:bodyPr wrap="square">
+            <a:spAutoFit/>
+          </a:bodyPr>
+          <a:lstStyle/>
+          <a:p>
+            <a:pPr algn="ctr"/>
+            <a:r>
+              <a:rPr sz="4800" b="1" i="0">
                 <a:solidFill>
                   <a:srgbClr val="FFFFFF"/>
                 </a:solidFill>
@@ -3157,8 +3157,8 @@
         </p:nvSpPr>
         <p:spPr>
           <a:xfrm>
-            <a:off x="594360" y="2560320"/>
-            <a:ext cx="11002975" cy="384048"/>
+            <a:off x="640080" y="2418588"/>
+            <a:ext cx="10911535" cy="365760"/>
           </a:xfrm>
           <a:prstGeom prst="rect">
             <a:avLst/>
@@ -3175,7 +3175,7 @@
             <a:r>
               <a:rPr sz="2400" b="0" i="1">
                 <a:solidFill>
-                  <a:srgbClr val="B4B4B4"/>
+                  <a:srgbClr val="AAAAAA"/>
                 </a:solidFill>
                 <a:latin typeface="Arial"/>
               </a:rPr>
@@ -3192,8 +3192,78 @@
         </p:nvSpPr>
         <p:spPr>
           <a:xfrm>
-            <a:off x="594360" y="2980944"/>
-            <a:ext cx="11002975" cy="347472"/>
+            <a:off x="640080" y="2985516"/>
+            <a:ext cx="10911535" cy="731520"/>
+          </a:xfrm>
+          <a:prstGeom prst="rect">
+            <a:avLst/>
+          </a:prstGeom>
+          <a:noFill/>
+        </p:spPr>
+        <p:txBody>
+          <a:bodyPr wrap="square">
+            <a:spAutoFit/>
+          </a:bodyPr>
+          <a:lstStyle/>
+          <a:p>
+            <a:pPr algn="ctr"/>
+            <a:r>
+              <a:rPr sz="4800" b="1" i="0">
+                <a:solidFill>
+                  <a:srgbClr val="FFFFFF"/>
+                </a:solidFill>
+                <a:latin typeface="Arial"/>
+              </a:rPr>
+              <a:t>悲しみ 　の 　波も</a:t>
+            </a:r>
+          </a:p>
+        </p:txBody>
+      </p:sp>
+      <p:sp>
+        <p:nvSpPr>
+          <p:cNvPr id="5" name="TextBox 4"/>
+          <p:cNvSpPr txBox="1"/>
+          <p:nvPr/>
+        </p:nvSpPr>
+        <p:spPr>
+          <a:xfrm>
+            <a:off x="640080" y="3753612"/>
+            <a:ext cx="10911535" cy="365760"/>
+          </a:xfrm>
+          <a:prstGeom prst="rect">
+            <a:avLst/>
+          </a:prstGeom>
+          <a:noFill/>
+        </p:spPr>
+        <p:txBody>
+          <a:bodyPr wrap="square">
+            <a:spAutoFit/>
+          </a:bodyPr>
+          <a:lstStyle/>
+          <a:p>
+            <a:pPr algn="ctr"/>
+            <a:r>
+              <a:rPr sz="2400" b="0" i="1">
+                <a:solidFill>
+                  <a:srgbClr val="AAAAAA"/>
+                </a:solidFill>
+                <a:latin typeface="Arial"/>
+              </a:rPr>
+              <a:t>kanashimi no namimo</a:t>
+            </a:r>
+          </a:p>
+        </p:txBody>
+      </p:sp>
+      <p:sp>
+        <p:nvSpPr>
+          <p:cNvPr id="6" name="TextBox 5"/>
+          <p:cNvSpPr txBox="1"/>
+          <p:nvPr/>
+        </p:nvSpPr>
+        <p:spPr>
+          <a:xfrm>
+            <a:off x="640080" y="4530852"/>
+            <a:ext cx="10911535" cy="310896"/>
           </a:xfrm>
           <a:prstGeom prst="rect">
             <a:avLst/>
@@ -3210,81 +3280,11 @@
             <a:r>
               <a:rPr sz="2000" b="0" i="1">
                 <a:solidFill>
-                  <a:srgbClr val="8C8C8C"/>
-                </a:solidFill>
-                <a:latin typeface="Arial"/>
-              </a:rPr>
-              <a:t/>
-            </a:r>
-          </a:p>
-        </p:txBody>
-      </p:sp>
-      <p:sp>
-        <p:nvSpPr>
-          <p:cNvPr id="5" name="TextBox 4"/>
-          <p:cNvSpPr txBox="1"/>
-          <p:nvPr/>
-        </p:nvSpPr>
-        <p:spPr>
-          <a:xfrm>
-            <a:off x="594360" y="3529584"/>
-            <a:ext cx="11002975" cy="685800"/>
-          </a:xfrm>
-          <a:prstGeom prst="rect">
-            <a:avLst/>
-          </a:prstGeom>
-          <a:noFill/>
-        </p:spPr>
-        <p:txBody>
-          <a:bodyPr wrap="square">
-            <a:spAutoFit/>
-          </a:bodyPr>
-          <a:lstStyle/>
-          <a:p>
-            <a:pPr algn="ctr"/>
-            <a:r>
-              <a:rPr sz="4400" b="1" i="0">
-                <a:solidFill>
-                  <a:srgbClr val="FFFFFF"/>
-                </a:solidFill>
-                <a:latin typeface="Arial"/>
-              </a:rPr>
-              <a:t>悲しみ 　の 　波も</a:t>
-            </a:r>
-          </a:p>
-        </p:txBody>
-      </p:sp>
-      <p:sp>
-        <p:nvSpPr>
-          <p:cNvPr id="6" name="TextBox 5"/>
-          <p:cNvSpPr txBox="1"/>
-          <p:nvPr/>
-        </p:nvSpPr>
-        <p:spPr>
-          <a:xfrm>
-            <a:off x="594360" y="4251960"/>
-            <a:ext cx="11002975" cy="384048"/>
-          </a:xfrm>
-          <a:prstGeom prst="rect">
-            <a:avLst/>
-          </a:prstGeom>
-          <a:noFill/>
-        </p:spPr>
-        <p:txBody>
-          <a:bodyPr wrap="square">
-            <a:spAutoFit/>
-          </a:bodyPr>
-          <a:lstStyle/>
-          <a:p>
-            <a:pPr algn="ctr"/>
-            <a:r>
-              <a:rPr sz="2400" b="0" i="1">
-                <a:solidFill>
-                  <a:srgbClr val="B4B4B4"/>
-                </a:solidFill>
-                <a:latin typeface="Arial"/>
-              </a:rPr>
-              <a:t>kanashimi no namimo</a:t>
+                  <a:srgbClr val="828282"/>
+                </a:solidFill>
+                <a:latin typeface="Arial"/>
+              </a:rPr>
+              <a:t>Está Bem com a Minha Alma</a:t>
             </a:r>
           </a:p>
         </p:txBody>
@@ -3297,8 +3297,8 @@
         </p:nvSpPr>
         <p:spPr>
           <a:xfrm>
-            <a:off x="594360" y="4672584"/>
-            <a:ext cx="11002975" cy="347472"/>
+            <a:off x="640080" y="4896612"/>
+            <a:ext cx="10911535" cy="310896"/>
           </a:xfrm>
           <a:prstGeom prst="rect">
             <a:avLst/>
@@ -3315,11 +3315,11 @@
             <a:r>
               <a:rPr sz="2000" b="0" i="1">
                 <a:solidFill>
-                  <a:srgbClr val="8C8C8C"/>
-                </a:solidFill>
-                <a:latin typeface="Arial"/>
-              </a:rPr>
-              <a:t/>
+                  <a:srgbClr val="828282"/>
+                </a:solidFill>
+                <a:latin typeface="Arial"/>
+              </a:rPr>
+              <a:t>Quando a paz como um rio acompanha meu caminho</a:t>
             </a:r>
           </a:p>
         </p:txBody>
@@ -3358,23 +3358,23 @@
         </p:nvSpPr>
         <p:spPr>
           <a:xfrm>
-            <a:off x="594360" y="1837944"/>
-            <a:ext cx="11002975" cy="685800"/>
-          </a:xfrm>
-          <a:prstGeom prst="rect">
-            <a:avLst/>
-          </a:prstGeom>
-          <a:noFill/>
-        </p:spPr>
-        <p:txBody>
-          <a:bodyPr wrap="square">
-            <a:spAutoFit/>
-          </a:bodyPr>
-          <a:lstStyle/>
-          <a:p>
-            <a:pPr algn="ctr"/>
-            <a:r>
-              <a:rPr sz="4400" b="1" i="0">
+            <a:off x="640080" y="1650492"/>
+            <a:ext cx="10911535" cy="731520"/>
+          </a:xfrm>
+          <a:prstGeom prst="rect">
+            <a:avLst/>
+          </a:prstGeom>
+          <a:noFill/>
+        </p:spPr>
+        <p:txBody>
+          <a:bodyPr wrap="square">
+            <a:spAutoFit/>
+          </a:bodyPr>
+          <a:lstStyle/>
+          <a:p>
+            <a:pPr algn="ctr"/>
+            <a:r>
+              <a:rPr sz="4800" b="1" i="0">
                 <a:solidFill>
                   <a:srgbClr val="FFFFFF"/>
                 </a:solidFill>
@@ -3393,8 +3393,8 @@
         </p:nvSpPr>
         <p:spPr>
           <a:xfrm>
-            <a:off x="594360" y="2560320"/>
-            <a:ext cx="11002975" cy="384048"/>
+            <a:off x="640080" y="2418588"/>
+            <a:ext cx="10911535" cy="365760"/>
           </a:xfrm>
           <a:prstGeom prst="rect">
             <a:avLst/>
@@ -3411,7 +3411,7 @@
             <a:r>
               <a:rPr sz="2400" b="0" i="1">
                 <a:solidFill>
-                  <a:srgbClr val="B4B4B4"/>
+                  <a:srgbClr val="AAAAAA"/>
                 </a:solidFill>
                 <a:latin typeface="Arial"/>
               </a:rPr>
@@ -3428,8 +3428,78 @@
         </p:nvSpPr>
         <p:spPr>
           <a:xfrm>
-            <a:off x="594360" y="2980944"/>
-            <a:ext cx="11002975" cy="347472"/>
+            <a:off x="640080" y="2985516"/>
+            <a:ext cx="10911535" cy="731520"/>
+          </a:xfrm>
+          <a:prstGeom prst="rect">
+            <a:avLst/>
+          </a:prstGeom>
+          <a:noFill/>
+        </p:spPr>
+        <p:txBody>
+          <a:bodyPr wrap="square">
+            <a:spAutoFit/>
+          </a:bodyPr>
+          <a:lstStyle/>
+          <a:p>
+            <a:pPr algn="ctr"/>
+            <a:r>
+              <a:rPr sz="4800" b="1" i="0">
+                <a:solidFill>
+                  <a:srgbClr val="FFFFFF"/>
+                </a:solidFill>
+                <a:latin typeface="Arial"/>
+              </a:rPr>
+              <a:t>釘 付け られ-て</a:t>
+            </a:r>
+          </a:p>
+        </p:txBody>
+      </p:sp>
+      <p:sp>
+        <p:nvSpPr>
+          <p:cNvPr id="5" name="TextBox 4"/>
+          <p:cNvSpPr txBox="1"/>
+          <p:nvPr/>
+        </p:nvSpPr>
+        <p:spPr>
+          <a:xfrm>
+            <a:off x="640080" y="3753612"/>
+            <a:ext cx="10911535" cy="365760"/>
+          </a:xfrm>
+          <a:prstGeom prst="rect">
+            <a:avLst/>
+          </a:prstGeom>
+          <a:noFill/>
+        </p:spPr>
+        <p:txBody>
+          <a:bodyPr wrap="square">
+            <a:spAutoFit/>
+          </a:bodyPr>
+          <a:lstStyle/>
+          <a:p>
+            <a:pPr algn="ctr"/>
+            <a:r>
+              <a:rPr sz="2400" b="0" i="1">
+                <a:solidFill>
+                  <a:srgbClr val="AAAAAA"/>
+                </a:solidFill>
+                <a:latin typeface="Arial"/>
+              </a:rPr>
+              <a:t>kugi tsukerarete</a:t>
+            </a:r>
+          </a:p>
+        </p:txBody>
+      </p:sp>
+      <p:sp>
+        <p:nvSpPr>
+          <p:cNvPr id="6" name="TextBox 5"/>
+          <p:cNvSpPr txBox="1"/>
+          <p:nvPr/>
+        </p:nvSpPr>
+        <p:spPr>
+          <a:xfrm>
+            <a:off x="640080" y="4530852"/>
+            <a:ext cx="10911535" cy="310896"/>
           </a:xfrm>
           <a:prstGeom prst="rect">
             <a:avLst/>
@@ -3446,81 +3516,11 @@
             <a:r>
               <a:rPr sz="2000" b="0" i="1">
                 <a:solidFill>
-                  <a:srgbClr val="8C8C8C"/>
-                </a:solidFill>
-                <a:latin typeface="Arial"/>
-              </a:rPr>
-              <a:t/>
-            </a:r>
-          </a:p>
-        </p:txBody>
-      </p:sp>
-      <p:sp>
-        <p:nvSpPr>
-          <p:cNvPr id="5" name="TextBox 4"/>
-          <p:cNvSpPr txBox="1"/>
-          <p:nvPr/>
-        </p:nvSpPr>
-        <p:spPr>
-          <a:xfrm>
-            <a:off x="594360" y="3529584"/>
-            <a:ext cx="11002975" cy="685800"/>
-          </a:xfrm>
-          <a:prstGeom prst="rect">
-            <a:avLst/>
-          </a:prstGeom>
-          <a:noFill/>
-        </p:spPr>
-        <p:txBody>
-          <a:bodyPr wrap="square">
-            <a:spAutoFit/>
-          </a:bodyPr>
-          <a:lstStyle/>
-          <a:p>
-            <a:pPr algn="ctr"/>
-            <a:r>
-              <a:rPr sz="4400" b="1" i="0">
-                <a:solidFill>
-                  <a:srgbClr val="FFFFFF"/>
-                </a:solidFill>
-                <a:latin typeface="Arial"/>
-              </a:rPr>
-              <a:t>釘 付け られ-て</a:t>
-            </a:r>
-          </a:p>
-        </p:txBody>
-      </p:sp>
-      <p:sp>
-        <p:nvSpPr>
-          <p:cNvPr id="6" name="TextBox 5"/>
-          <p:cNvSpPr txBox="1"/>
-          <p:nvPr/>
-        </p:nvSpPr>
-        <p:spPr>
-          <a:xfrm>
-            <a:off x="594360" y="4251960"/>
-            <a:ext cx="11002975" cy="384048"/>
-          </a:xfrm>
-          <a:prstGeom prst="rect">
-            <a:avLst/>
-          </a:prstGeom>
-          <a:noFill/>
-        </p:spPr>
-        <p:txBody>
-          <a:bodyPr wrap="square">
-            <a:spAutoFit/>
-          </a:bodyPr>
-          <a:lstStyle/>
-          <a:p>
-            <a:pPr algn="ctr"/>
-            <a:r>
-              <a:rPr sz="2400" b="0" i="1">
-                <a:solidFill>
-                  <a:srgbClr val="B4B4B4"/>
-                </a:solidFill>
-                <a:latin typeface="Arial"/>
-              </a:rPr>
-              <a:t>kugi tsukerarete</a:t>
+                  <a:srgbClr val="828282"/>
+                </a:solidFill>
+                <a:latin typeface="Arial"/>
+              </a:rPr>
+              <a:t>Está Bem com a Minha Alma</a:t>
             </a:r>
           </a:p>
         </p:txBody>
@@ -3533,8 +3533,8 @@
         </p:nvSpPr>
         <p:spPr>
           <a:xfrm>
-            <a:off x="594360" y="4672584"/>
-            <a:ext cx="11002975" cy="347472"/>
+            <a:off x="640080" y="4896612"/>
+            <a:ext cx="10911535" cy="310896"/>
           </a:xfrm>
           <a:prstGeom prst="rect">
             <a:avLst/>
@@ -3551,11 +3551,11 @@
             <a:r>
               <a:rPr sz="2000" b="0" i="1">
                 <a:solidFill>
-                  <a:srgbClr val="8C8C8C"/>
-                </a:solidFill>
-                <a:latin typeface="Arial"/>
-              </a:rPr>
-              <a:t/>
+                  <a:srgbClr val="828282"/>
+                </a:solidFill>
+                <a:latin typeface="Arial"/>
+              </a:rPr>
+              <a:t>Quando a paz como um rio acompanha meu caminho</a:t>
             </a:r>
           </a:p>
         </p:txBody>
@@ -3594,23 +3594,23 @@
         </p:nvSpPr>
         <p:spPr>
           <a:xfrm>
-            <a:off x="594360" y="1837944"/>
-            <a:ext cx="11002975" cy="685800"/>
-          </a:xfrm>
-          <a:prstGeom prst="rect">
-            <a:avLst/>
-          </a:prstGeom>
-          <a:noFill/>
-        </p:spPr>
-        <p:txBody>
-          <a:bodyPr wrap="square">
-            <a:spAutoFit/>
-          </a:bodyPr>
-          <a:lstStyle/>
-          <a:p>
-            <a:pPr algn="ctr"/>
-            <a:r>
-              <a:rPr sz="4400" b="1" i="0">
+            <a:off x="640080" y="1650492"/>
+            <a:ext cx="10911535" cy="731520"/>
+          </a:xfrm>
+          <a:prstGeom prst="rect">
+            <a:avLst/>
+          </a:prstGeom>
+          <a:noFill/>
+        </p:spPr>
+        <p:txBody>
+          <a:bodyPr wrap="square">
+            <a:spAutoFit/>
+          </a:bodyPr>
+          <a:lstStyle/>
+          <a:p>
+            <a:pPr algn="ctr"/>
+            <a:r>
+              <a:rPr sz="4800" b="1" i="0">
                 <a:solidFill>
                   <a:srgbClr val="FFFFFF"/>
                 </a:solidFill>
@@ -3629,8 +3629,8 @@
         </p:nvSpPr>
         <p:spPr>
           <a:xfrm>
-            <a:off x="594360" y="2560320"/>
-            <a:ext cx="11002975" cy="384048"/>
+            <a:off x="640080" y="2418588"/>
+            <a:ext cx="10911535" cy="365760"/>
           </a:xfrm>
           <a:prstGeom prst="rect">
             <a:avLst/>
@@ -3647,7 +3647,7 @@
             <a:r>
               <a:rPr sz="2400" b="0" i="1">
                 <a:solidFill>
-                  <a:srgbClr val="B4B4B4"/>
+                  <a:srgbClr val="AAAAAA"/>
                 </a:solidFill>
                 <a:latin typeface="Arial"/>
               </a:rPr>
@@ -3664,8 +3664,78 @@
         </p:nvSpPr>
         <p:spPr>
           <a:xfrm>
-            <a:off x="594360" y="2980944"/>
-            <a:ext cx="11002975" cy="347472"/>
+            <a:off x="640080" y="2985516"/>
+            <a:ext cx="10911535" cy="731520"/>
+          </a:xfrm>
+          <a:prstGeom prst="rect">
+            <a:avLst/>
+          </a:prstGeom>
+          <a:noFill/>
+        </p:spPr>
+        <p:txBody>
+          <a:bodyPr wrap="square">
+            <a:spAutoFit/>
+          </a:bodyPr>
+          <a:lstStyle/>
+          <a:p>
+            <a:pPr algn="ctr"/>
+            <a:r>
+              <a:rPr sz="4800" b="1" i="0">
+                <a:solidFill>
+                  <a:srgbClr val="FFFFFF"/>
+                </a:solidFill>
+                <a:latin typeface="Arial"/>
+              </a:rPr>
+              <a:t>誉めよ、イエス を 誉めよ</a:t>
+            </a:r>
+          </a:p>
+        </p:txBody>
+      </p:sp>
+      <p:sp>
+        <p:nvSpPr>
+          <p:cNvPr id="5" name="TextBox 4"/>
+          <p:cNvSpPr txBox="1"/>
+          <p:nvPr/>
+        </p:nvSpPr>
+        <p:spPr>
+          <a:xfrm>
+            <a:off x="640080" y="3753612"/>
+            <a:ext cx="10911535" cy="365760"/>
+          </a:xfrm>
+          <a:prstGeom prst="rect">
+            <a:avLst/>
+          </a:prstGeom>
+          <a:noFill/>
+        </p:spPr>
+        <p:txBody>
+          <a:bodyPr wrap="square">
+            <a:spAutoFit/>
+          </a:bodyPr>
+          <a:lstStyle/>
+          <a:p>
+            <a:pPr algn="ctr"/>
+            <a:r>
+              <a:rPr sz="2400" b="0" i="1">
+                <a:solidFill>
+                  <a:srgbClr val="AAAAAA"/>
+                </a:solidFill>
+                <a:latin typeface="Arial"/>
+              </a:rPr>
+              <a:t>homeyo iesu wo homeyo</a:t>
+            </a:r>
+          </a:p>
+        </p:txBody>
+      </p:sp>
+      <p:sp>
+        <p:nvSpPr>
+          <p:cNvPr id="6" name="TextBox 5"/>
+          <p:cNvSpPr txBox="1"/>
+          <p:nvPr/>
+        </p:nvSpPr>
+        <p:spPr>
+          <a:xfrm>
+            <a:off x="640080" y="4530852"/>
+            <a:ext cx="10911535" cy="310896"/>
           </a:xfrm>
           <a:prstGeom prst="rect">
             <a:avLst/>
@@ -3682,81 +3752,11 @@
             <a:r>
               <a:rPr sz="2000" b="0" i="1">
                 <a:solidFill>
-                  <a:srgbClr val="8C8C8C"/>
-                </a:solidFill>
-                <a:latin typeface="Arial"/>
-              </a:rPr>
-              <a:t/>
-            </a:r>
-          </a:p>
-        </p:txBody>
-      </p:sp>
-      <p:sp>
-        <p:nvSpPr>
-          <p:cNvPr id="5" name="TextBox 4"/>
-          <p:cNvSpPr txBox="1"/>
-          <p:nvPr/>
-        </p:nvSpPr>
-        <p:spPr>
-          <a:xfrm>
-            <a:off x="594360" y="3529584"/>
-            <a:ext cx="11002975" cy="685800"/>
-          </a:xfrm>
-          <a:prstGeom prst="rect">
-            <a:avLst/>
-          </a:prstGeom>
-          <a:noFill/>
-        </p:spPr>
-        <p:txBody>
-          <a:bodyPr wrap="square">
-            <a:spAutoFit/>
-          </a:bodyPr>
-          <a:lstStyle/>
-          <a:p>
-            <a:pPr algn="ctr"/>
-            <a:r>
-              <a:rPr sz="4400" b="1" i="0">
-                <a:solidFill>
-                  <a:srgbClr val="FFFFFF"/>
-                </a:solidFill>
-                <a:latin typeface="Arial"/>
-              </a:rPr>
-              <a:t>誉めよ、イエス を 誉めよ</a:t>
-            </a:r>
-          </a:p>
-        </p:txBody>
-      </p:sp>
-      <p:sp>
-        <p:nvSpPr>
-          <p:cNvPr id="6" name="TextBox 5"/>
-          <p:cNvSpPr txBox="1"/>
-          <p:nvPr/>
-        </p:nvSpPr>
-        <p:spPr>
-          <a:xfrm>
-            <a:off x="594360" y="4251960"/>
-            <a:ext cx="11002975" cy="384048"/>
-          </a:xfrm>
-          <a:prstGeom prst="rect">
-            <a:avLst/>
-          </a:prstGeom>
-          <a:noFill/>
-        </p:spPr>
-        <p:txBody>
-          <a:bodyPr wrap="square">
-            <a:spAutoFit/>
-          </a:bodyPr>
-          <a:lstStyle/>
-          <a:p>
-            <a:pPr algn="ctr"/>
-            <a:r>
-              <a:rPr sz="2400" b="0" i="1">
-                <a:solidFill>
-                  <a:srgbClr val="B4B4B4"/>
-                </a:solidFill>
-                <a:latin typeface="Arial"/>
-              </a:rPr>
-              <a:t>homeyo iesu wo homeyo</a:t>
+                  <a:srgbClr val="828282"/>
+                </a:solidFill>
+                <a:latin typeface="Arial"/>
+              </a:rPr>
+              <a:t>Quando tristezas como ondas do mar me rolam</a:t>
             </a:r>
           </a:p>
         </p:txBody>
@@ -3769,8 +3769,8 @@
         </p:nvSpPr>
         <p:spPr>
           <a:xfrm>
-            <a:off x="594360" y="4672584"/>
-            <a:ext cx="11002975" cy="347472"/>
+            <a:off x="640080" y="4896612"/>
+            <a:ext cx="10911535" cy="310896"/>
           </a:xfrm>
           <a:prstGeom prst="rect">
             <a:avLst/>
@@ -3787,11 +3787,11 @@
             <a:r>
               <a:rPr sz="2000" b="0" i="1">
                 <a:solidFill>
-                  <a:srgbClr val="8C8C8C"/>
-                </a:solidFill>
-                <a:latin typeface="Arial"/>
-              </a:rPr>
-              <a:t/>
+                  <a:srgbClr val="828282"/>
+                </a:solidFill>
+                <a:latin typeface="Arial"/>
+              </a:rPr>
+              <a:t>O que quer que seja minha sorte, aprendi a dizer</a:t>
             </a:r>
           </a:p>
         </p:txBody>
@@ -3830,23 +3830,23 @@
         </p:nvSpPr>
         <p:spPr>
           <a:xfrm>
-            <a:off x="594360" y="1837944"/>
-            <a:ext cx="11002975" cy="685800"/>
-          </a:xfrm>
-          <a:prstGeom prst="rect">
-            <a:avLst/>
-          </a:prstGeom>
-          <a:noFill/>
-        </p:spPr>
-        <p:txBody>
-          <a:bodyPr wrap="square">
-            <a:spAutoFit/>
-          </a:bodyPr>
-          <a:lstStyle/>
-          <a:p>
-            <a:pPr algn="ctr"/>
-            <a:r>
-              <a:rPr sz="3520" b="1" i="0">
+            <a:off x="640080" y="1650492"/>
+            <a:ext cx="10911535" cy="731520"/>
+          </a:xfrm>
+          <a:prstGeom prst="rect">
+            <a:avLst/>
+          </a:prstGeom>
+          <a:noFill/>
+        </p:spPr>
+        <p:txBody>
+          <a:bodyPr wrap="square">
+            <a:spAutoFit/>
+          </a:bodyPr>
+          <a:lstStyle/>
+          <a:p>
+            <a:pPr algn="ctr"/>
+            <a:r>
+              <a:rPr sz="3800" b="1" i="0">
                 <a:solidFill>
                   <a:srgbClr val="FFFFFF"/>
                 </a:solidFill>
@@ -3865,8 +3865,8 @@
         </p:nvSpPr>
         <p:spPr>
           <a:xfrm>
-            <a:off x="594360" y="2560320"/>
-            <a:ext cx="11002975" cy="384048"/>
+            <a:off x="640080" y="2418588"/>
+            <a:ext cx="10911535" cy="365760"/>
           </a:xfrm>
           <a:prstGeom prst="rect">
             <a:avLst/>
@@ -3883,7 +3883,7 @@
             <a:r>
               <a:rPr sz="2400" b="0" i="1">
                 <a:solidFill>
-                  <a:srgbClr val="B4B4B4"/>
+                  <a:srgbClr val="AAAAAA"/>
                 </a:solidFill>
                 <a:latin typeface="Arial"/>
               </a:rPr>
@@ -3900,8 +3900,78 @@
         </p:nvSpPr>
         <p:spPr>
           <a:xfrm>
-            <a:off x="594360" y="2980944"/>
-            <a:ext cx="11002975" cy="347472"/>
+            <a:off x="640080" y="2985516"/>
+            <a:ext cx="10911535" cy="731520"/>
+          </a:xfrm>
+          <a:prstGeom prst="rect">
+            <a:avLst/>
+          </a:prstGeom>
+          <a:noFill/>
+        </p:spPr>
+        <p:txBody>
+          <a:bodyPr wrap="square">
+            <a:spAutoFit/>
+          </a:bodyPr>
+          <a:lstStyle/>
+          <a:p>
+            <a:pPr algn="ctr"/>
+            <a:r>
+              <a:rPr sz="4800" b="1" i="0">
+                <a:solidFill>
+                  <a:srgbClr val="FFFFFF"/>
+                </a:solidFill>
+                <a:latin typeface="Arial"/>
+              </a:rPr>
+              <a:t>こころ　みたす　へいわ</a:t>
+            </a:r>
+          </a:p>
+        </p:txBody>
+      </p:sp>
+      <p:sp>
+        <p:nvSpPr>
+          <p:cNvPr id="5" name="TextBox 4"/>
+          <p:cNvSpPr txBox="1"/>
+          <p:nvPr/>
+        </p:nvSpPr>
+        <p:spPr>
+          <a:xfrm>
+            <a:off x="640080" y="3753612"/>
+            <a:ext cx="10911535" cy="365760"/>
+          </a:xfrm>
+          <a:prstGeom prst="rect">
+            <a:avLst/>
+          </a:prstGeom>
+          <a:noFill/>
+        </p:spPr>
+        <p:txBody>
+          <a:bodyPr wrap="square">
+            <a:spAutoFit/>
+          </a:bodyPr>
+          <a:lstStyle/>
+          <a:p>
+            <a:pPr algn="ctr"/>
+            <a:r>
+              <a:rPr sz="2400" b="0" i="1">
+                <a:solidFill>
+                  <a:srgbClr val="AAAAAA"/>
+                </a:solidFill>
+                <a:latin typeface="Arial"/>
+              </a:rPr>
+              <a:t>kokoro   mitasu  heiwa</a:t>
+            </a:r>
+          </a:p>
+        </p:txBody>
+      </p:sp>
+      <p:sp>
+        <p:nvSpPr>
+          <p:cNvPr id="6" name="TextBox 5"/>
+          <p:cNvSpPr txBox="1"/>
+          <p:nvPr/>
+        </p:nvSpPr>
+        <p:spPr>
+          <a:xfrm>
+            <a:off x="640080" y="4530852"/>
+            <a:ext cx="10911535" cy="310896"/>
           </a:xfrm>
           <a:prstGeom prst="rect">
             <a:avLst/>
@@ -3918,81 +3988,11 @@
             <a:r>
               <a:rPr sz="2000" b="0" i="1">
                 <a:solidFill>
-                  <a:srgbClr val="8C8C8C"/>
-                </a:solidFill>
-                <a:latin typeface="Arial"/>
-              </a:rPr>
-              <a:t/>
-            </a:r>
-          </a:p>
-        </p:txBody>
-      </p:sp>
-      <p:sp>
-        <p:nvSpPr>
-          <p:cNvPr id="5" name="TextBox 4"/>
-          <p:cNvSpPr txBox="1"/>
-          <p:nvPr/>
-        </p:nvSpPr>
-        <p:spPr>
-          <a:xfrm>
-            <a:off x="594360" y="3529584"/>
-            <a:ext cx="11002975" cy="685800"/>
-          </a:xfrm>
-          <a:prstGeom prst="rect">
-            <a:avLst/>
-          </a:prstGeom>
-          <a:noFill/>
-        </p:spPr>
-        <p:txBody>
-          <a:bodyPr wrap="square">
-            <a:spAutoFit/>
-          </a:bodyPr>
-          <a:lstStyle/>
-          <a:p>
-            <a:pPr algn="ctr"/>
-            <a:r>
-              <a:rPr sz="4400" b="1" i="0">
-                <a:solidFill>
-                  <a:srgbClr val="FFFFFF"/>
-                </a:solidFill>
-                <a:latin typeface="Arial"/>
-              </a:rPr>
-              <a:t>こころ　みたす　へいわ</a:t>
-            </a:r>
-          </a:p>
-        </p:txBody>
-      </p:sp>
-      <p:sp>
-        <p:nvSpPr>
-          <p:cNvPr id="6" name="TextBox 5"/>
-          <p:cNvSpPr txBox="1"/>
-          <p:nvPr/>
-        </p:nvSpPr>
-        <p:spPr>
-          <a:xfrm>
-            <a:off x="594360" y="4251960"/>
-            <a:ext cx="11002975" cy="384048"/>
-          </a:xfrm>
-          <a:prstGeom prst="rect">
-            <a:avLst/>
-          </a:prstGeom>
-          <a:noFill/>
-        </p:spPr>
-        <p:txBody>
-          <a:bodyPr wrap="square">
-            <a:spAutoFit/>
-          </a:bodyPr>
-          <a:lstStyle/>
-          <a:p>
-            <a:pPr algn="ctr"/>
-            <a:r>
-              <a:rPr sz="2400" b="0" i="1">
-                <a:solidFill>
-                  <a:srgbClr val="B4B4B4"/>
-                </a:solidFill>
-                <a:latin typeface="Arial"/>
-              </a:rPr>
-              <a:t>kokoro   mitasu  heiwa</a:t>
+                  <a:srgbClr val="828282"/>
+                </a:solidFill>
+                <a:latin typeface="Arial"/>
+              </a:rPr>
+              <a:t>Meu pecado, ó a alegria desse pensamento glorioso</a:t>
             </a:r>
           </a:p>
         </p:txBody>
@@ -4005,8 +4005,8 @@
         </p:nvSpPr>
         <p:spPr>
           <a:xfrm>
-            <a:off x="594360" y="4672584"/>
-            <a:ext cx="11002975" cy="347472"/>
+            <a:off x="640080" y="4896612"/>
+            <a:ext cx="10911535" cy="310896"/>
           </a:xfrm>
           <a:prstGeom prst="rect">
             <a:avLst/>
@@ -4023,11 +4023,11 @@
             <a:r>
               <a:rPr sz="2000" b="0" i="1">
                 <a:solidFill>
-                  <a:srgbClr val="8C8C8C"/>
-                </a:solidFill>
-                <a:latin typeface="Arial"/>
-              </a:rPr>
-              <a:t/>
+                  <a:srgbClr val="828282"/>
+                </a:solidFill>
+                <a:latin typeface="Arial"/>
+              </a:rPr>
+              <a:t>Meu pecado, não em parte, mas todo</a:t>
             </a:r>
           </a:p>
         </p:txBody>
@@ -4066,23 +4066,23 @@
         </p:nvSpPr>
         <p:spPr>
           <a:xfrm>
-            <a:off x="594360" y="2258568"/>
-            <a:ext cx="11002975" cy="685800"/>
-          </a:xfrm>
-          <a:prstGeom prst="rect">
-            <a:avLst/>
-          </a:prstGeom>
-          <a:noFill/>
-        </p:spPr>
-        <p:txBody>
-          <a:bodyPr wrap="square">
-            <a:spAutoFit/>
-          </a:bodyPr>
-          <a:lstStyle/>
-          <a:p>
-            <a:pPr algn="ctr"/>
-            <a:r>
-              <a:rPr sz="4022" b="1" i="0">
+            <a:off x="640080" y="2052828"/>
+            <a:ext cx="10911535" cy="731520"/>
+          </a:xfrm>
+          <a:prstGeom prst="rect">
+            <a:avLst/>
+          </a:prstGeom>
+          <a:noFill/>
+        </p:spPr>
+        <p:txBody>
+          <a:bodyPr wrap="square">
+            <a:spAutoFit/>
+          </a:bodyPr>
+          <a:lstStyle/>
+          <a:p>
+            <a:pPr algn="ctr"/>
+            <a:r>
+              <a:rPr sz="4300" b="1" i="0">
                 <a:solidFill>
                   <a:srgbClr val="FFFFFF"/>
                 </a:solidFill>
@@ -4101,99 +4101,29 @@
         </p:nvSpPr>
         <p:spPr>
           <a:xfrm>
-            <a:off x="594360" y="2980944"/>
-            <a:ext cx="11002975" cy="347472"/>
-          </a:xfrm>
-          <a:prstGeom prst="rect">
-            <a:avLst/>
-          </a:prstGeom>
-          <a:noFill/>
-        </p:spPr>
-        <p:txBody>
-          <a:bodyPr wrap="square">
-            <a:spAutoFit/>
-          </a:bodyPr>
-          <a:lstStyle/>
-          <a:p>
-            <a:pPr algn="ctr"/>
-            <a:r>
-              <a:rPr sz="2200" b="0" i="1">
-                <a:solidFill>
-                  <a:srgbClr val="8C8C8C"/>
-                </a:solidFill>
-                <a:latin typeface="Arial"/>
-              </a:rPr>
-              <a:t/>
-            </a:r>
-          </a:p>
-        </p:txBody>
-      </p:sp>
-      <p:sp>
-        <p:nvSpPr>
-          <p:cNvPr id="4" name="TextBox 3"/>
-          <p:cNvSpPr txBox="1"/>
-          <p:nvPr/>
-        </p:nvSpPr>
-        <p:spPr>
-          <a:xfrm>
-            <a:off x="594360" y="3529584"/>
-            <a:ext cx="11002975" cy="685800"/>
-          </a:xfrm>
-          <a:prstGeom prst="rect">
-            <a:avLst/>
-          </a:prstGeom>
-          <a:noFill/>
-        </p:spPr>
-        <p:txBody>
-          <a:bodyPr wrap="square">
-            <a:spAutoFit/>
-          </a:bodyPr>
-          <a:lstStyle/>
-          <a:p>
-            <a:pPr algn="ctr"/>
-            <a:r>
-              <a:rPr sz="4400" b="1" i="0">
+            <a:off x="640080" y="2985516"/>
+            <a:ext cx="10911535" cy="731520"/>
+          </a:xfrm>
+          <a:prstGeom prst="rect">
+            <a:avLst/>
+          </a:prstGeom>
+          <a:noFill/>
+        </p:spPr>
+        <p:txBody>
+          <a:bodyPr wrap="square">
+            <a:spAutoFit/>
+          </a:bodyPr>
+          <a:lstStyle/>
+          <a:p>
+            <a:pPr algn="ctr"/>
+            <a:r>
+              <a:rPr sz="4800" b="1" i="0">
                 <a:solidFill>
                   <a:srgbClr val="FFFFFF"/>
                 </a:solidFill>
                 <a:latin typeface="Arial"/>
               </a:rPr>
               <a:t>Está bem com a minha alma</a:t>
-            </a:r>
-          </a:p>
-        </p:txBody>
-      </p:sp>
-      <p:sp>
-        <p:nvSpPr>
-          <p:cNvPr id="5" name="TextBox 4"/>
-          <p:cNvSpPr txBox="1"/>
-          <p:nvPr/>
-        </p:nvSpPr>
-        <p:spPr>
-          <a:xfrm>
-            <a:off x="594360" y="4251960"/>
-            <a:ext cx="11002975" cy="347472"/>
-          </a:xfrm>
-          <a:prstGeom prst="rect">
-            <a:avLst/>
-          </a:prstGeom>
-          <a:noFill/>
-        </p:spPr>
-        <p:txBody>
-          <a:bodyPr wrap="square">
-            <a:spAutoFit/>
-          </a:bodyPr>
-          <a:lstStyle/>
-          <a:p>
-            <a:pPr algn="ctr"/>
-            <a:r>
-              <a:rPr sz="2200" b="0" i="1">
-                <a:solidFill>
-                  <a:srgbClr val="8C8C8C"/>
-                </a:solidFill>
-                <a:latin typeface="Arial"/>
-              </a:rPr>
-              <a:t/>
             </a:r>
           </a:p>
         </p:txBody>
@@ -4232,23 +4162,23 @@
         </p:nvSpPr>
         <p:spPr>
           <a:xfrm>
-            <a:off x="594360" y="2258568"/>
-            <a:ext cx="11002975" cy="685800"/>
-          </a:xfrm>
-          <a:prstGeom prst="rect">
-            <a:avLst/>
-          </a:prstGeom>
-          <a:noFill/>
-        </p:spPr>
-        <p:txBody>
-          <a:bodyPr wrap="square">
-            <a:spAutoFit/>
-          </a:bodyPr>
-          <a:lstStyle/>
-          <a:p>
-            <a:pPr algn="ctr"/>
-            <a:r>
-              <a:rPr sz="4400" b="1" i="0">
+            <a:off x="640080" y="2052828"/>
+            <a:ext cx="10911535" cy="731520"/>
+          </a:xfrm>
+          <a:prstGeom prst="rect">
+            <a:avLst/>
+          </a:prstGeom>
+          <a:noFill/>
+        </p:spPr>
+        <p:txBody>
+          <a:bodyPr wrap="square">
+            <a:spAutoFit/>
+          </a:bodyPr>
+          <a:lstStyle/>
+          <a:p>
+            <a:pPr algn="ctr"/>
+            <a:r>
+              <a:rPr sz="4800" b="1" i="0">
                 <a:solidFill>
                   <a:srgbClr val="FFFFFF"/>
                 </a:solidFill>
@@ -4267,99 +4197,29 @@
         </p:nvSpPr>
         <p:spPr>
           <a:xfrm>
-            <a:off x="594360" y="2980944"/>
-            <a:ext cx="11002975" cy="347472"/>
-          </a:xfrm>
-          <a:prstGeom prst="rect">
-            <a:avLst/>
-          </a:prstGeom>
-          <a:noFill/>
-        </p:spPr>
-        <p:txBody>
-          <a:bodyPr wrap="square">
-            <a:spAutoFit/>
-          </a:bodyPr>
-          <a:lstStyle/>
-          <a:p>
-            <a:pPr algn="ctr"/>
-            <a:r>
-              <a:rPr sz="2200" b="0" i="1">
-                <a:solidFill>
-                  <a:srgbClr val="8C8C8C"/>
-                </a:solidFill>
-                <a:latin typeface="Arial"/>
-              </a:rPr>
-              <a:t/>
-            </a:r>
-          </a:p>
-        </p:txBody>
-      </p:sp>
-      <p:sp>
-        <p:nvSpPr>
-          <p:cNvPr id="4" name="TextBox 3"/>
-          <p:cNvSpPr txBox="1"/>
-          <p:nvPr/>
-        </p:nvSpPr>
-        <p:spPr>
-          <a:xfrm>
-            <a:off x="594360" y="3529584"/>
-            <a:ext cx="11002975" cy="685800"/>
-          </a:xfrm>
-          <a:prstGeom prst="rect">
-            <a:avLst/>
-          </a:prstGeom>
-          <a:noFill/>
-        </p:spPr>
-        <p:txBody>
-          <a:bodyPr wrap="square">
-            <a:spAutoFit/>
-          </a:bodyPr>
-          <a:lstStyle/>
-          <a:p>
-            <a:pPr algn="ctr"/>
-            <a:r>
-              <a:rPr sz="4022" b="1" i="0">
+            <a:off x="640080" y="2985516"/>
+            <a:ext cx="10911535" cy="731520"/>
+          </a:xfrm>
+          <a:prstGeom prst="rect">
+            <a:avLst/>
+          </a:prstGeom>
+          <a:noFill/>
+        </p:spPr>
+        <p:txBody>
+          <a:bodyPr wrap="square">
+            <a:spAutoFit/>
+          </a:bodyPr>
+          <a:lstStyle/>
+          <a:p>
+            <a:pPr algn="ctr"/>
+            <a:r>
+              <a:rPr sz="4300" b="1" i="0">
                 <a:solidFill>
                   <a:srgbClr val="FFFFFF"/>
                 </a:solidFill>
                 <a:latin typeface="Arial"/>
               </a:rPr>
               <a:t>Está bem, está bem com a minha alma</a:t>
-            </a:r>
-          </a:p>
-        </p:txBody>
-      </p:sp>
-      <p:sp>
-        <p:nvSpPr>
-          <p:cNvPr id="5" name="TextBox 4"/>
-          <p:cNvSpPr txBox="1"/>
-          <p:nvPr/>
-        </p:nvSpPr>
-        <p:spPr>
-          <a:xfrm>
-            <a:off x="594360" y="4251960"/>
-            <a:ext cx="11002975" cy="347472"/>
-          </a:xfrm>
-          <a:prstGeom prst="rect">
-            <a:avLst/>
-          </a:prstGeom>
-          <a:noFill/>
-        </p:spPr>
-        <p:txBody>
-          <a:bodyPr wrap="square">
-            <a:spAutoFit/>
-          </a:bodyPr>
-          <a:lstStyle/>
-          <a:p>
-            <a:pPr algn="ctr"/>
-            <a:r>
-              <a:rPr sz="2200" b="0" i="1">
-                <a:solidFill>
-                  <a:srgbClr val="8C8C8C"/>
-                </a:solidFill>
-                <a:latin typeface="Arial"/>
-              </a:rPr>
-              <a:t/>
             </a:r>
           </a:p>
         </p:txBody>
@@ -4398,23 +4258,23 @@
         </p:nvSpPr>
         <p:spPr>
           <a:xfrm>
-            <a:off x="594360" y="2258568"/>
-            <a:ext cx="11002975" cy="685800"/>
-          </a:xfrm>
-          <a:prstGeom prst="rect">
-            <a:avLst/>
-          </a:prstGeom>
-          <a:noFill/>
-        </p:spPr>
-        <p:txBody>
-          <a:bodyPr wrap="square">
-            <a:spAutoFit/>
-          </a:bodyPr>
-          <a:lstStyle/>
-          <a:p>
-            <a:pPr algn="ctr"/>
-            <a:r>
-              <a:rPr sz="2816" b="1" i="0">
+            <a:off x="640080" y="2052828"/>
+            <a:ext cx="10911535" cy="731520"/>
+          </a:xfrm>
+          <a:prstGeom prst="rect">
+            <a:avLst/>
+          </a:prstGeom>
+          <a:noFill/>
+        </p:spPr>
+        <p:txBody>
+          <a:bodyPr wrap="square">
+            <a:spAutoFit/>
+          </a:bodyPr>
+          <a:lstStyle/>
+          <a:p>
+            <a:pPr algn="ctr"/>
+            <a:r>
+              <a:rPr sz="3000" b="1" i="0">
                 <a:solidFill>
                   <a:srgbClr val="FFFFFF"/>
                 </a:solidFill>
@@ -4433,99 +4293,29 @@
         </p:nvSpPr>
         <p:spPr>
           <a:xfrm>
-            <a:off x="594360" y="2980944"/>
-            <a:ext cx="11002975" cy="347472"/>
-          </a:xfrm>
-          <a:prstGeom prst="rect">
-            <a:avLst/>
-          </a:prstGeom>
-          <a:noFill/>
-        </p:spPr>
-        <p:txBody>
-          <a:bodyPr wrap="square">
-            <a:spAutoFit/>
-          </a:bodyPr>
-          <a:lstStyle/>
-          <a:p>
-            <a:pPr algn="ctr"/>
-            <a:r>
-              <a:rPr sz="2200" b="0" i="1">
-                <a:solidFill>
-                  <a:srgbClr val="8C8C8C"/>
-                </a:solidFill>
-                <a:latin typeface="Arial"/>
-              </a:rPr>
-              <a:t/>
-            </a:r>
-          </a:p>
-        </p:txBody>
-      </p:sp>
-      <p:sp>
-        <p:nvSpPr>
-          <p:cNvPr id="4" name="TextBox 3"/>
-          <p:cNvSpPr txBox="1"/>
-          <p:nvPr/>
-        </p:nvSpPr>
-        <p:spPr>
-          <a:xfrm>
-            <a:off x="594360" y="3529584"/>
-            <a:ext cx="11002975" cy="685800"/>
-          </a:xfrm>
-          <a:prstGeom prst="rect">
-            <a:avLst/>
-          </a:prstGeom>
-          <a:noFill/>
-        </p:spPr>
-        <p:txBody>
-          <a:bodyPr wrap="square">
-            <a:spAutoFit/>
-          </a:bodyPr>
-          <a:lstStyle/>
-          <a:p>
-            <a:pPr algn="ctr"/>
-            <a:r>
-              <a:rPr sz="3610" b="1" i="0">
+            <a:off x="640080" y="2985516"/>
+            <a:ext cx="10911535" cy="731520"/>
+          </a:xfrm>
+          <a:prstGeom prst="rect">
+            <a:avLst/>
+          </a:prstGeom>
+          <a:noFill/>
+        </p:spPr>
+        <p:txBody>
+          <a:bodyPr wrap="square">
+            <a:spAutoFit/>
+          </a:bodyPr>
+          <a:lstStyle/>
+          <a:p>
+            <a:pPr algn="ctr"/>
+            <a:r>
+              <a:rPr sz="3900" b="1" i="0">
                 <a:solidFill>
                   <a:srgbClr val="FFFFFF"/>
                 </a:solidFill>
                 <a:latin typeface="Arial"/>
               </a:rPr>
               <a:t>O nuvens se enrolarão, o trombete soará</a:t>
-            </a:r>
-          </a:p>
-        </p:txBody>
-      </p:sp>
-      <p:sp>
-        <p:nvSpPr>
-          <p:cNvPr id="5" name="TextBox 4"/>
-          <p:cNvSpPr txBox="1"/>
-          <p:nvPr/>
-        </p:nvSpPr>
-        <p:spPr>
-          <a:xfrm>
-            <a:off x="594360" y="4251960"/>
-            <a:ext cx="11002975" cy="347472"/>
-          </a:xfrm>
-          <a:prstGeom prst="rect">
-            <a:avLst/>
-          </a:prstGeom>
-          <a:noFill/>
-        </p:spPr>
-        <p:txBody>
-          <a:bodyPr wrap="square">
-            <a:spAutoFit/>
-          </a:bodyPr>
-          <a:lstStyle/>
-          <a:p>
-            <a:pPr algn="ctr"/>
-            <a:r>
-              <a:rPr sz="2200" b="0" i="1">
-                <a:solidFill>
-                  <a:srgbClr val="8C8C8C"/>
-                </a:solidFill>
-                <a:latin typeface="Arial"/>
-              </a:rPr>
-              <a:t/>
             </a:r>
           </a:p>
         </p:txBody>
@@ -4564,23 +4354,23 @@
         </p:nvSpPr>
         <p:spPr>
           <a:xfrm>
-            <a:off x="594360" y="2258568"/>
-            <a:ext cx="11002975" cy="685800"/>
-          </a:xfrm>
-          <a:prstGeom prst="rect">
-            <a:avLst/>
-          </a:prstGeom>
-          <a:noFill/>
-        </p:spPr>
-        <p:txBody>
-          <a:bodyPr wrap="square">
-            <a:spAutoFit/>
-          </a:bodyPr>
-          <a:lstStyle/>
-          <a:p>
-            <a:pPr algn="ctr"/>
-            <a:r>
-              <a:rPr sz="2873" b="1" i="0">
+            <a:off x="640080" y="2052828"/>
+            <a:ext cx="10911535" cy="731520"/>
+          </a:xfrm>
+          <a:prstGeom prst="rect">
+            <a:avLst/>
+          </a:prstGeom>
+          <a:noFill/>
+        </p:spPr>
+        <p:txBody>
+          <a:bodyPr wrap="square">
+            <a:spAutoFit/>
+          </a:bodyPr>
+          <a:lstStyle/>
+          <a:p>
+            <a:pPr algn="ctr"/>
+            <a:r>
+              <a:rPr sz="3100" b="1" i="0">
                 <a:solidFill>
                   <a:srgbClr val="FFFFFF"/>
                 </a:solidFill>
@@ -4599,29 +4389,29 @@
         </p:nvSpPr>
         <p:spPr>
           <a:xfrm>
-            <a:off x="594360" y="2980944"/>
-            <a:ext cx="11002975" cy="347472"/>
-          </a:xfrm>
-          <a:prstGeom prst="rect">
-            <a:avLst/>
-          </a:prstGeom>
-          <a:noFill/>
-        </p:spPr>
-        <p:txBody>
-          <a:bodyPr wrap="square">
-            <a:spAutoFit/>
-          </a:bodyPr>
-          <a:lstStyle/>
-          <a:p>
-            <a:pPr algn="ctr"/>
-            <a:r>
-              <a:rPr sz="2200" b="0" i="1">
-                <a:solidFill>
-                  <a:srgbClr val="8C8C8C"/>
-                </a:solidFill>
-                <a:latin typeface="Arial"/>
-              </a:rPr>
-              <a:t/>
+            <a:off x="640080" y="2985516"/>
+            <a:ext cx="10911535" cy="731520"/>
+          </a:xfrm>
+          <a:prstGeom prst="rect">
+            <a:avLst/>
+          </a:prstGeom>
+          <a:noFill/>
+        </p:spPr>
+        <p:txBody>
+          <a:bodyPr wrap="square">
+            <a:spAutoFit/>
+          </a:bodyPr>
+          <a:lstStyle/>
+          <a:p>
+            <a:pPr algn="ctr"/>
+            <a:r>
+              <a:rPr sz="4500" b="1" i="0">
+                <a:solidFill>
+                  <a:srgbClr val="FFFFFF"/>
+                </a:solidFill>
+                <a:latin typeface="Arial"/>
+              </a:rPr>
+              <a:t>Meu pecado, não em parte, mas todo</a:t>
             </a:r>
           </a:p>
         </p:txBody>
@@ -4634,29 +4424,29 @@
         </p:nvSpPr>
         <p:spPr>
           <a:xfrm>
-            <a:off x="594360" y="3529584"/>
-            <a:ext cx="11002975" cy="685800"/>
-          </a:xfrm>
-          <a:prstGeom prst="rect">
-            <a:avLst/>
-          </a:prstGeom>
-          <a:noFill/>
-        </p:spPr>
-        <p:txBody>
-          <a:bodyPr wrap="square">
-            <a:spAutoFit/>
-          </a:bodyPr>
-          <a:lstStyle/>
-          <a:p>
-            <a:pPr algn="ctr"/>
-            <a:r>
-              <a:rPr sz="4141" b="1" i="0">
-                <a:solidFill>
-                  <a:srgbClr val="FFFFFF"/>
-                </a:solidFill>
-                <a:latin typeface="Arial"/>
-              </a:rPr>
-              <a:t>Meu pecado, não em parte, mas todo</a:t>
+            <a:off x="640080" y="4128516"/>
+            <a:ext cx="10911535" cy="310896"/>
+          </a:xfrm>
+          <a:prstGeom prst="rect">
+            <a:avLst/>
+          </a:prstGeom>
+          <a:noFill/>
+        </p:spPr>
+        <p:txBody>
+          <a:bodyPr wrap="square">
+            <a:spAutoFit/>
+          </a:bodyPr>
+          <a:lstStyle/>
+          <a:p>
+            <a:pPr algn="ctr"/>
+            <a:r>
+              <a:rPr sz="2000" b="0" i="0">
+                <a:solidFill>
+                  <a:srgbClr val="828282"/>
+                </a:solidFill>
+                <a:latin typeface="Arial"/>
+              </a:rPr>
+              <a:t>心     (こころ)       満たす    (みたす)</a:t>
             </a:r>
           </a:p>
         </p:txBody>
@@ -4669,29 +4459,29 @@
         </p:nvSpPr>
         <p:spPr>
           <a:xfrm>
-            <a:off x="594360" y="4251960"/>
-            <a:ext cx="11002975" cy="347472"/>
-          </a:xfrm>
-          <a:prstGeom prst="rect">
-            <a:avLst/>
-          </a:prstGeom>
-          <a:noFill/>
-        </p:spPr>
-        <p:txBody>
-          <a:bodyPr wrap="square">
-            <a:spAutoFit/>
-          </a:bodyPr>
-          <a:lstStyle/>
-          <a:p>
-            <a:pPr algn="ctr"/>
-            <a:r>
-              <a:rPr sz="2200" b="0" i="1">
-                <a:solidFill>
-                  <a:srgbClr val="8C8C8C"/>
-                </a:solidFill>
-                <a:latin typeface="Arial"/>
-              </a:rPr>
-              <a:t/>
+            <a:off x="640080" y="4494276"/>
+            <a:ext cx="10911535" cy="310896"/>
+          </a:xfrm>
+          <a:prstGeom prst="rect">
+            <a:avLst/>
+          </a:prstGeom>
+          <a:noFill/>
+        </p:spPr>
+        <p:txBody>
+          <a:bodyPr wrap="square">
+            <a:spAutoFit/>
+          </a:bodyPr>
+          <a:lstStyle/>
+          <a:p>
+            <a:pPr algn="ctr"/>
+            <a:r>
+              <a:rPr sz="2000" b="0" i="0">
+                <a:solidFill>
+                  <a:srgbClr val="828282"/>
+                </a:solidFill>
+                <a:latin typeface="Arial"/>
+              </a:rPr>
+              <a:t>こころ　みたす　へいわ</a:t>
             </a:r>
           </a:p>
         </p:txBody>
@@ -4730,23 +4520,23 @@
         </p:nvSpPr>
         <p:spPr>
           <a:xfrm>
-            <a:off x="594360" y="2258568"/>
-            <a:ext cx="11002975" cy="685800"/>
-          </a:xfrm>
-          <a:prstGeom prst="rect">
-            <a:avLst/>
-          </a:prstGeom>
-          <a:noFill/>
-        </p:spPr>
-        <p:txBody>
-          <a:bodyPr wrap="square">
-            <a:spAutoFit/>
-          </a:bodyPr>
-          <a:lstStyle/>
-          <a:p>
-            <a:pPr algn="ctr"/>
-            <a:r>
-              <a:rPr sz="3434" b="1" i="0">
+            <a:off x="640080" y="2052828"/>
+            <a:ext cx="10911535" cy="731520"/>
+          </a:xfrm>
+          <a:prstGeom prst="rect">
+            <a:avLst/>
+          </a:prstGeom>
+          <a:noFill/>
+        </p:spPr>
+        <p:txBody>
+          <a:bodyPr wrap="square">
+            <a:spAutoFit/>
+          </a:bodyPr>
+          <a:lstStyle/>
+          <a:p>
+            <a:pPr algn="ctr"/>
+            <a:r>
+              <a:rPr sz="3700" b="1" i="0">
                 <a:solidFill>
                   <a:srgbClr val="FFFFFF"/>
                 </a:solidFill>
@@ -4765,29 +4555,29 @@
         </p:nvSpPr>
         <p:spPr>
           <a:xfrm>
-            <a:off x="594360" y="2980944"/>
-            <a:ext cx="11002975" cy="347472"/>
-          </a:xfrm>
-          <a:prstGeom prst="rect">
-            <a:avLst/>
-          </a:prstGeom>
-          <a:noFill/>
-        </p:spPr>
-        <p:txBody>
-          <a:bodyPr wrap="square">
-            <a:spAutoFit/>
-          </a:bodyPr>
-          <a:lstStyle/>
-          <a:p>
-            <a:pPr algn="ctr"/>
-            <a:r>
-              <a:rPr sz="2200" b="0" i="1">
-                <a:solidFill>
-                  <a:srgbClr val="8C8C8C"/>
-                </a:solidFill>
-                <a:latin typeface="Arial"/>
-              </a:rPr>
-              <a:t/>
+            <a:off x="640080" y="2985516"/>
+            <a:ext cx="10911535" cy="731520"/>
+          </a:xfrm>
+          <a:prstGeom prst="rect">
+            <a:avLst/>
+          </a:prstGeom>
+          <a:noFill/>
+        </p:spPr>
+        <p:txBody>
+          <a:bodyPr wrap="square">
+            <a:spAutoFit/>
+          </a:bodyPr>
+          <a:lstStyle/>
+          <a:p>
+            <a:pPr algn="ctr"/>
+            <a:r>
+              <a:rPr sz="4800" b="1" i="0">
+                <a:solidFill>
+                  <a:srgbClr val="FFFFFF"/>
+                </a:solidFill>
+                <a:latin typeface="Arial"/>
+              </a:rPr>
+              <a:t>E o Senhor descerá</a:t>
             </a:r>
           </a:p>
         </p:txBody>
@@ -4800,29 +4590,29 @@
         </p:nvSpPr>
         <p:spPr>
           <a:xfrm>
-            <a:off x="594360" y="3529584"/>
-            <a:ext cx="11002975" cy="685800"/>
-          </a:xfrm>
-          <a:prstGeom prst="rect">
-            <a:avLst/>
-          </a:prstGeom>
-          <a:noFill/>
-        </p:spPr>
-        <p:txBody>
-          <a:bodyPr wrap="square">
-            <a:spAutoFit/>
-          </a:bodyPr>
-          <a:lstStyle/>
-          <a:p>
-            <a:pPr algn="ctr"/>
-            <a:r>
-              <a:rPr sz="4400" b="1" i="0">
-                <a:solidFill>
-                  <a:srgbClr val="FFFFFF"/>
-                </a:solidFill>
-                <a:latin typeface="Arial"/>
-              </a:rPr>
-              <a:t>E o Senhor descerá</a:t>
+            <a:off x="640080" y="4128516"/>
+            <a:ext cx="10911535" cy="310896"/>
+          </a:xfrm>
+          <a:prstGeom prst="rect">
+            <a:avLst/>
+          </a:prstGeom>
+          <a:noFill/>
+        </p:spPr>
+        <p:txBody>
+          <a:bodyPr wrap="square">
+            <a:spAutoFit/>
+          </a:bodyPr>
+          <a:lstStyle/>
+          <a:p>
+            <a:pPr algn="ctr"/>
+            <a:r>
+              <a:rPr sz="2000" b="0" i="0">
+                <a:solidFill>
+                  <a:srgbClr val="828282"/>
+                </a:solidFill>
+                <a:latin typeface="Arial"/>
+              </a:rPr>
+              <a:t>心     (こころ)       満たす    (みたす)</a:t>
             </a:r>
           </a:p>
         </p:txBody>
@@ -4835,29 +4625,29 @@
         </p:nvSpPr>
         <p:spPr>
           <a:xfrm>
-            <a:off x="594360" y="4251960"/>
-            <a:ext cx="11002975" cy="347472"/>
-          </a:xfrm>
-          <a:prstGeom prst="rect">
-            <a:avLst/>
-          </a:prstGeom>
-          <a:noFill/>
-        </p:spPr>
-        <p:txBody>
-          <a:bodyPr wrap="square">
-            <a:spAutoFit/>
-          </a:bodyPr>
-          <a:lstStyle/>
-          <a:p>
-            <a:pPr algn="ctr"/>
-            <a:r>
-              <a:rPr sz="2200" b="0" i="1">
-                <a:solidFill>
-                  <a:srgbClr val="8C8C8C"/>
-                </a:solidFill>
-                <a:latin typeface="Arial"/>
-              </a:rPr>
-              <a:t/>
+            <a:off x="640080" y="4494276"/>
+            <a:ext cx="10911535" cy="310896"/>
+          </a:xfrm>
+          <a:prstGeom prst="rect">
+            <a:avLst/>
+          </a:prstGeom>
+          <a:noFill/>
+        </p:spPr>
+        <p:txBody>
+          <a:bodyPr wrap="square">
+            <a:spAutoFit/>
+          </a:bodyPr>
+          <a:lstStyle/>
+          <a:p>
+            <a:pPr algn="ctr"/>
+            <a:r>
+              <a:rPr sz="2000" b="0" i="0">
+                <a:solidFill>
+                  <a:srgbClr val="828282"/>
+                </a:solidFill>
+                <a:latin typeface="Arial"/>
+              </a:rPr>
+              <a:t>こころ　みたす　へいわ</a:t>
             </a:r>
           </a:p>
         </p:txBody>
@@ -4896,23 +4686,23 @@
         </p:nvSpPr>
         <p:spPr>
           <a:xfrm>
-            <a:off x="594360" y="2258568"/>
-            <a:ext cx="11002975" cy="685800"/>
-          </a:xfrm>
-          <a:prstGeom prst="rect">
-            <a:avLst/>
-          </a:prstGeom>
-          <a:noFill/>
-        </p:spPr>
-        <p:txBody>
-          <a:bodyPr wrap="square">
-            <a:spAutoFit/>
-          </a:bodyPr>
-          <a:lstStyle/>
-          <a:p>
-            <a:pPr algn="ctr"/>
-            <a:r>
-              <a:rPr sz="4141" b="1" i="0">
+            <a:off x="640080" y="2052828"/>
+            <a:ext cx="10911535" cy="731520"/>
+          </a:xfrm>
+          <a:prstGeom prst="rect">
+            <a:avLst/>
+          </a:prstGeom>
+          <a:noFill/>
+        </p:spPr>
+        <p:txBody>
+          <a:bodyPr wrap="square">
+            <a:spAutoFit/>
+          </a:bodyPr>
+          <a:lstStyle/>
+          <a:p>
+            <a:pPr algn="ctr"/>
+            <a:r>
+              <a:rPr sz="4500" b="1" i="0">
                 <a:solidFill>
                   <a:srgbClr val="FFFFFF"/>
                 </a:solidFill>
@@ -4931,29 +4721,29 @@
         </p:nvSpPr>
         <p:spPr>
           <a:xfrm>
-            <a:off x="594360" y="2980944"/>
-            <a:ext cx="11002975" cy="347472"/>
-          </a:xfrm>
-          <a:prstGeom prst="rect">
-            <a:avLst/>
-          </a:prstGeom>
-          <a:noFill/>
-        </p:spPr>
-        <p:txBody>
-          <a:bodyPr wrap="square">
-            <a:spAutoFit/>
-          </a:bodyPr>
-          <a:lstStyle/>
-          <a:p>
-            <a:pPr algn="ctr"/>
-            <a:r>
-              <a:rPr sz="2200" b="0" i="1">
-                <a:solidFill>
-                  <a:srgbClr val="8C8C8C"/>
-                </a:solidFill>
-                <a:latin typeface="Arial"/>
-              </a:rPr>
-              <a:t/>
+            <a:off x="640080" y="2985516"/>
+            <a:ext cx="10911535" cy="731520"/>
+          </a:xfrm>
+          <a:prstGeom prst="rect">
+            <a:avLst/>
+          </a:prstGeom>
+          <a:noFill/>
+        </p:spPr>
+        <p:txBody>
+          <a:bodyPr wrap="square">
+            <a:spAutoFit/>
+          </a:bodyPr>
+          <a:lstStyle/>
+          <a:p>
+            <a:pPr algn="ctr"/>
+            <a:r>
+              <a:rPr sz="4800" b="1" i="0">
+                <a:solidFill>
+                  <a:srgbClr val="FFFFFF"/>
+                </a:solidFill>
+                <a:latin typeface="Arial"/>
+              </a:rPr>
+              <a:t>E o Senhor descerá</a:t>
             </a:r>
           </a:p>
         </p:txBody>
@@ -4966,29 +4756,29 @@
         </p:nvSpPr>
         <p:spPr>
           <a:xfrm>
-            <a:off x="594360" y="3529584"/>
-            <a:ext cx="11002975" cy="685800"/>
-          </a:xfrm>
-          <a:prstGeom prst="rect">
-            <a:avLst/>
-          </a:prstGeom>
-          <a:noFill/>
-        </p:spPr>
-        <p:txBody>
-          <a:bodyPr wrap="square">
-            <a:spAutoFit/>
-          </a:bodyPr>
-          <a:lstStyle/>
-          <a:p>
-            <a:pPr algn="ctr"/>
-            <a:r>
-              <a:rPr sz="4400" b="1" i="0">
-                <a:solidFill>
-                  <a:srgbClr val="FFFFFF"/>
-                </a:solidFill>
-                <a:latin typeface="Arial"/>
-              </a:rPr>
-              <a:t>E o Senhor descerá</a:t>
+            <a:off x="640080" y="4128516"/>
+            <a:ext cx="10911535" cy="310896"/>
+          </a:xfrm>
+          <a:prstGeom prst="rect">
+            <a:avLst/>
+          </a:prstGeom>
+          <a:noFill/>
+        </p:spPr>
+        <p:txBody>
+          <a:bodyPr wrap="square">
+            <a:spAutoFit/>
+          </a:bodyPr>
+          <a:lstStyle/>
+          <a:p>
+            <a:pPr algn="ctr"/>
+            <a:r>
+              <a:rPr sz="2000" b="0" i="0">
+                <a:solidFill>
+                  <a:srgbClr val="828282"/>
+                </a:solidFill>
+                <a:latin typeface="Arial"/>
+              </a:rPr>
+              <a:t>心     (こころ)       満たす    (みたす)</a:t>
             </a:r>
           </a:p>
         </p:txBody>
@@ -5001,29 +4791,29 @@
         </p:nvSpPr>
         <p:spPr>
           <a:xfrm>
-            <a:off x="594360" y="4251960"/>
-            <a:ext cx="11002975" cy="347472"/>
-          </a:xfrm>
-          <a:prstGeom prst="rect">
-            <a:avLst/>
-          </a:prstGeom>
-          <a:noFill/>
-        </p:spPr>
-        <p:txBody>
-          <a:bodyPr wrap="square">
-            <a:spAutoFit/>
-          </a:bodyPr>
-          <a:lstStyle/>
-          <a:p>
-            <a:pPr algn="ctr"/>
-            <a:r>
-              <a:rPr sz="2200" b="0" i="1">
-                <a:solidFill>
-                  <a:srgbClr val="8C8C8C"/>
-                </a:solidFill>
-                <a:latin typeface="Arial"/>
-              </a:rPr>
-              <a:t/>
+            <a:off x="640080" y="4494276"/>
+            <a:ext cx="10911535" cy="310896"/>
+          </a:xfrm>
+          <a:prstGeom prst="rect">
+            <a:avLst/>
+          </a:prstGeom>
+          <a:noFill/>
+        </p:spPr>
+        <p:txBody>
+          <a:bodyPr wrap="square">
+            <a:spAutoFit/>
+          </a:bodyPr>
+          <a:lstStyle/>
+          <a:p>
+            <a:pPr algn="ctr"/>
+            <a:r>
+              <a:rPr sz="2000" b="0" i="0">
+                <a:solidFill>
+                  <a:srgbClr val="828282"/>
+                </a:solidFill>
+                <a:latin typeface="Arial"/>
+              </a:rPr>
+              <a:t>こころ　みたす　へいわ</a:t>
             </a:r>
           </a:p>
         </p:txBody>
@@ -5062,23 +4852,23 @@
         </p:nvSpPr>
         <p:spPr>
           <a:xfrm>
-            <a:off x="594360" y="1837944"/>
-            <a:ext cx="11002975" cy="685800"/>
-          </a:xfrm>
-          <a:prstGeom prst="rect">
-            <a:avLst/>
-          </a:prstGeom>
-          <a:noFill/>
-        </p:spPr>
-        <p:txBody>
-          <a:bodyPr wrap="square">
-            <a:spAutoFit/>
-          </a:bodyPr>
-          <a:lstStyle/>
-          <a:p>
-            <a:pPr algn="ctr"/>
-            <a:r>
-              <a:rPr sz="3520" b="1" i="0">
+            <a:off x="640080" y="1650492"/>
+            <a:ext cx="10911535" cy="731520"/>
+          </a:xfrm>
+          <a:prstGeom prst="rect">
+            <a:avLst/>
+          </a:prstGeom>
+          <a:noFill/>
+        </p:spPr>
+        <p:txBody>
+          <a:bodyPr wrap="square">
+            <a:spAutoFit/>
+          </a:bodyPr>
+          <a:lstStyle/>
+          <a:p>
+            <a:pPr algn="ctr"/>
+            <a:r>
+              <a:rPr sz="3800" b="1" i="0">
                 <a:solidFill>
                   <a:srgbClr val="FFFFFF"/>
                 </a:solidFill>
@@ -5097,8 +4887,8 @@
         </p:nvSpPr>
         <p:spPr>
           <a:xfrm>
-            <a:off x="594360" y="2560320"/>
-            <a:ext cx="11002975" cy="384048"/>
+            <a:off x="640080" y="2418588"/>
+            <a:ext cx="10911535" cy="365760"/>
           </a:xfrm>
           <a:prstGeom prst="rect">
             <a:avLst/>
@@ -5115,7 +4905,7 @@
             <a:r>
               <a:rPr sz="2400" b="0" i="1">
                 <a:solidFill>
-                  <a:srgbClr val="B4B4B4"/>
+                  <a:srgbClr val="AAAAAA"/>
                 </a:solidFill>
                 <a:latin typeface="Arial"/>
               </a:rPr>
@@ -5132,8 +4922,78 @@
         </p:nvSpPr>
         <p:spPr>
           <a:xfrm>
-            <a:off x="594360" y="2980944"/>
-            <a:ext cx="11002975" cy="347472"/>
+            <a:off x="640080" y="2985516"/>
+            <a:ext cx="10911535" cy="731520"/>
+          </a:xfrm>
+          <a:prstGeom prst="rect">
+            <a:avLst/>
+          </a:prstGeom>
+          <a:noFill/>
+        </p:spPr>
+        <p:txBody>
+          <a:bodyPr wrap="square">
+            <a:spAutoFit/>
+          </a:bodyPr>
+          <a:lstStyle/>
+          <a:p>
+            <a:pPr algn="ctr"/>
+            <a:r>
+              <a:rPr sz="4800" b="1" i="0">
+                <a:solidFill>
+                  <a:srgbClr val="FFFFFF"/>
+                </a:solidFill>
+                <a:latin typeface="Arial"/>
+              </a:rPr>
+              <a:t>こころ　みたす　へいわ</a:t>
+            </a:r>
+          </a:p>
+        </p:txBody>
+      </p:sp>
+      <p:sp>
+        <p:nvSpPr>
+          <p:cNvPr id="5" name="TextBox 4"/>
+          <p:cNvSpPr txBox="1"/>
+          <p:nvPr/>
+        </p:nvSpPr>
+        <p:spPr>
+          <a:xfrm>
+            <a:off x="640080" y="3753612"/>
+            <a:ext cx="10911535" cy="365760"/>
+          </a:xfrm>
+          <a:prstGeom prst="rect">
+            <a:avLst/>
+          </a:prstGeom>
+          <a:noFill/>
+        </p:spPr>
+        <p:txBody>
+          <a:bodyPr wrap="square">
+            <a:spAutoFit/>
+          </a:bodyPr>
+          <a:lstStyle/>
+          <a:p>
+            <a:pPr algn="ctr"/>
+            <a:r>
+              <a:rPr sz="2400" b="0" i="1">
+                <a:solidFill>
+                  <a:srgbClr val="AAAAAA"/>
+                </a:solidFill>
+                <a:latin typeface="Arial"/>
+              </a:rPr>
+              <a:t>kokoro   mitasu  heiwa</a:t>
+            </a:r>
+          </a:p>
+        </p:txBody>
+      </p:sp>
+      <p:sp>
+        <p:nvSpPr>
+          <p:cNvPr id="6" name="TextBox 5"/>
+          <p:cNvSpPr txBox="1"/>
+          <p:nvPr/>
+        </p:nvSpPr>
+        <p:spPr>
+          <a:xfrm>
+            <a:off x="640080" y="4530852"/>
+            <a:ext cx="10911535" cy="310896"/>
           </a:xfrm>
           <a:prstGeom prst="rect">
             <a:avLst/>
@@ -5150,81 +5010,11 @@
             <a:r>
               <a:rPr sz="2000" b="0" i="1">
                 <a:solidFill>
-                  <a:srgbClr val="8C8C8C"/>
-                </a:solidFill>
-                <a:latin typeface="Arial"/>
-              </a:rPr>
-              <a:t/>
-            </a:r>
-          </a:p>
-        </p:txBody>
-      </p:sp>
-      <p:sp>
-        <p:nvSpPr>
-          <p:cNvPr id="5" name="TextBox 4"/>
-          <p:cNvSpPr txBox="1"/>
-          <p:nvPr/>
-        </p:nvSpPr>
-        <p:spPr>
-          <a:xfrm>
-            <a:off x="594360" y="3529584"/>
-            <a:ext cx="11002975" cy="685800"/>
-          </a:xfrm>
-          <a:prstGeom prst="rect">
-            <a:avLst/>
-          </a:prstGeom>
-          <a:noFill/>
-        </p:spPr>
-        <p:txBody>
-          <a:bodyPr wrap="square">
-            <a:spAutoFit/>
-          </a:bodyPr>
-          <a:lstStyle/>
-          <a:p>
-            <a:pPr algn="ctr"/>
-            <a:r>
-              <a:rPr sz="4400" b="1" i="0">
-                <a:solidFill>
-                  <a:srgbClr val="FFFFFF"/>
-                </a:solidFill>
-                <a:latin typeface="Arial"/>
-              </a:rPr>
-              <a:t>こころ　みたす　へいわ</a:t>
-            </a:r>
-          </a:p>
-        </p:txBody>
-      </p:sp>
-      <p:sp>
-        <p:nvSpPr>
-          <p:cNvPr id="6" name="TextBox 5"/>
-          <p:cNvSpPr txBox="1"/>
-          <p:nvPr/>
-        </p:nvSpPr>
-        <p:spPr>
-          <a:xfrm>
-            <a:off x="594360" y="4251960"/>
-            <a:ext cx="11002975" cy="384048"/>
-          </a:xfrm>
-          <a:prstGeom prst="rect">
-            <a:avLst/>
-          </a:prstGeom>
-          <a:noFill/>
-        </p:spPr>
-        <p:txBody>
-          <a:bodyPr wrap="square">
-            <a:spAutoFit/>
-          </a:bodyPr>
-          <a:lstStyle/>
-          <a:p>
-            <a:pPr algn="ctr"/>
-            <a:r>
-              <a:rPr sz="2400" b="0" i="1">
-                <a:solidFill>
-                  <a:srgbClr val="B4B4B4"/>
-                </a:solidFill>
-                <a:latin typeface="Arial"/>
-              </a:rPr>
-              <a:t>kokoro   mitasu  heiwa</a:t>
+                  <a:srgbClr val="828282"/>
+                </a:solidFill>
+                <a:latin typeface="Arial"/>
+              </a:rPr>
+              <a:t>Meu pecado, ó a alegria desse pensamento glorioso</a:t>
             </a:r>
           </a:p>
         </p:txBody>
@@ -5237,8 +5027,8 @@
         </p:nvSpPr>
         <p:spPr>
           <a:xfrm>
-            <a:off x="594360" y="4672584"/>
-            <a:ext cx="11002975" cy="347472"/>
+            <a:off x="640080" y="4896612"/>
+            <a:ext cx="10911535" cy="310896"/>
           </a:xfrm>
           <a:prstGeom prst="rect">
             <a:avLst/>
@@ -5255,11 +5045,11 @@
             <a:r>
               <a:rPr sz="2000" b="0" i="1">
                 <a:solidFill>
-                  <a:srgbClr val="8C8C8C"/>
-                </a:solidFill>
-                <a:latin typeface="Arial"/>
-              </a:rPr>
-              <a:t/>
+                  <a:srgbClr val="828282"/>
+                </a:solidFill>
+                <a:latin typeface="Arial"/>
+              </a:rPr>
+              <a:t>Meu pecado, não em parte, mas todo</a:t>
             </a:r>
           </a:p>
         </p:txBody>
@@ -5298,23 +5088,23 @@
         </p:nvSpPr>
         <p:spPr>
           <a:xfrm>
-            <a:off x="594360" y="1837944"/>
-            <a:ext cx="11002975" cy="685800"/>
-          </a:xfrm>
-          <a:prstGeom prst="rect">
-            <a:avLst/>
-          </a:prstGeom>
-          <a:noFill/>
-        </p:spPr>
-        <p:txBody>
-          <a:bodyPr wrap="square">
-            <a:spAutoFit/>
-          </a:bodyPr>
-          <a:lstStyle/>
-          <a:p>
-            <a:pPr algn="ctr"/>
-            <a:r>
-              <a:rPr sz="4400" b="1" i="0">
+            <a:off x="640080" y="1650492"/>
+            <a:ext cx="10911535" cy="731520"/>
+          </a:xfrm>
+          <a:prstGeom prst="rect">
+            <a:avLst/>
+          </a:prstGeom>
+          <a:noFill/>
+        </p:spPr>
+        <p:txBody>
+          <a:bodyPr wrap="square">
+            <a:spAutoFit/>
+          </a:bodyPr>
+          <a:lstStyle/>
+          <a:p>
+            <a:pPr algn="ctr"/>
+            <a:r>
+              <a:rPr sz="4800" b="1" i="0">
                 <a:solidFill>
                   <a:srgbClr val="FFFFFF"/>
                 </a:solidFill>
@@ -5333,8 +5123,8 @@
         </p:nvSpPr>
         <p:spPr>
           <a:xfrm>
-            <a:off x="594360" y="2560320"/>
-            <a:ext cx="11002975" cy="384048"/>
+            <a:off x="640080" y="2418588"/>
+            <a:ext cx="10911535" cy="365760"/>
           </a:xfrm>
           <a:prstGeom prst="rect">
             <a:avLst/>
@@ -5351,7 +5141,7 @@
             <a:r>
               <a:rPr sz="2400" b="0" i="1">
                 <a:solidFill>
-                  <a:srgbClr val="B4B4B4"/>
+                  <a:srgbClr val="AAAAAA"/>
                 </a:solidFill>
                 <a:latin typeface="Arial"/>
               </a:rPr>
@@ -5368,8 +5158,78 @@
         </p:nvSpPr>
         <p:spPr>
           <a:xfrm>
-            <a:off x="594360" y="2980944"/>
-            <a:ext cx="11002975" cy="347472"/>
+            <a:off x="640080" y="2985516"/>
+            <a:ext cx="10911535" cy="731520"/>
+          </a:xfrm>
+          <a:prstGeom prst="rect">
+            <a:avLst/>
+          </a:prstGeom>
+          <a:noFill/>
+        </p:spPr>
+        <p:txBody>
+          <a:bodyPr wrap="square">
+            <a:spAutoFit/>
+          </a:bodyPr>
+          <a:lstStyle/>
+          <a:p>
+            <a:pPr algn="ctr"/>
+            <a:r>
+              <a:rPr sz="4800" b="1" i="0">
+                <a:solidFill>
+                  <a:srgbClr val="FFFFFF"/>
+                </a:solidFill>
+                <a:latin typeface="Arial"/>
+              </a:rPr>
+              <a:t>こころ　　満たす 平-和</a:t>
+            </a:r>
+          </a:p>
+        </p:txBody>
+      </p:sp>
+      <p:sp>
+        <p:nvSpPr>
+          <p:cNvPr id="5" name="TextBox 4"/>
+          <p:cNvSpPr txBox="1"/>
+          <p:nvPr/>
+        </p:nvSpPr>
+        <p:spPr>
+          <a:xfrm>
+            <a:off x="640080" y="3753612"/>
+            <a:ext cx="10911535" cy="365760"/>
+          </a:xfrm>
+          <a:prstGeom prst="rect">
+            <a:avLst/>
+          </a:prstGeom>
+          <a:noFill/>
+        </p:spPr>
+        <p:txBody>
+          <a:bodyPr wrap="square">
+            <a:spAutoFit/>
+          </a:bodyPr>
+          <a:lstStyle/>
+          <a:p>
+            <a:pPr algn="ctr"/>
+            <a:r>
+              <a:rPr sz="2400" b="0" i="1">
+                <a:solidFill>
+                  <a:srgbClr val="AAAAAA"/>
+                </a:solidFill>
+                <a:latin typeface="Arial"/>
+              </a:rPr>
+              <a:t>kokoro mitasu heiwa</a:t>
+            </a:r>
+          </a:p>
+        </p:txBody>
+      </p:sp>
+      <p:sp>
+        <p:nvSpPr>
+          <p:cNvPr id="6" name="TextBox 5"/>
+          <p:cNvSpPr txBox="1"/>
+          <p:nvPr/>
+        </p:nvSpPr>
+        <p:spPr>
+          <a:xfrm>
+            <a:off x="640080" y="4530852"/>
+            <a:ext cx="10911535" cy="310896"/>
           </a:xfrm>
           <a:prstGeom prst="rect">
             <a:avLst/>
@@ -5386,81 +5246,11 @@
             <a:r>
               <a:rPr sz="2000" b="0" i="1">
                 <a:solidFill>
-                  <a:srgbClr val="8C8C8C"/>
-                </a:solidFill>
-                <a:latin typeface="Arial"/>
-              </a:rPr>
-              <a:t/>
-            </a:r>
-          </a:p>
-        </p:txBody>
-      </p:sp>
-      <p:sp>
-        <p:nvSpPr>
-          <p:cNvPr id="5" name="TextBox 4"/>
-          <p:cNvSpPr txBox="1"/>
-          <p:nvPr/>
-        </p:nvSpPr>
-        <p:spPr>
-          <a:xfrm>
-            <a:off x="594360" y="3529584"/>
-            <a:ext cx="11002975" cy="685800"/>
-          </a:xfrm>
-          <a:prstGeom prst="rect">
-            <a:avLst/>
-          </a:prstGeom>
-          <a:noFill/>
-        </p:spPr>
-        <p:txBody>
-          <a:bodyPr wrap="square">
-            <a:spAutoFit/>
-          </a:bodyPr>
-          <a:lstStyle/>
-          <a:p>
-            <a:pPr algn="ctr"/>
-            <a:r>
-              <a:rPr sz="4400" b="1" i="0">
-                <a:solidFill>
-                  <a:srgbClr val="FFFFFF"/>
-                </a:solidFill>
-                <a:latin typeface="Arial"/>
-              </a:rPr>
-              <a:t>こころ　　満たす 平-和</a:t>
-            </a:r>
-          </a:p>
-        </p:txBody>
-      </p:sp>
-      <p:sp>
-        <p:nvSpPr>
-          <p:cNvPr id="6" name="TextBox 5"/>
-          <p:cNvSpPr txBox="1"/>
-          <p:nvPr/>
-        </p:nvSpPr>
-        <p:spPr>
-          <a:xfrm>
-            <a:off x="594360" y="4251960"/>
-            <a:ext cx="11002975" cy="384048"/>
-          </a:xfrm>
-          <a:prstGeom prst="rect">
-            <a:avLst/>
-          </a:prstGeom>
-          <a:noFill/>
-        </p:spPr>
-        <p:txBody>
-          <a:bodyPr wrap="square">
-            <a:spAutoFit/>
-          </a:bodyPr>
-          <a:lstStyle/>
-          <a:p>
-            <a:pPr algn="ctr"/>
-            <a:r>
-              <a:rPr sz="2400" b="0" i="1">
-                <a:solidFill>
-                  <a:srgbClr val="B4B4B4"/>
-                </a:solidFill>
-                <a:latin typeface="Arial"/>
-              </a:rPr>
-              <a:t>kokoro mitasu heiwa</a:t>
+                  <a:srgbClr val="828282"/>
+                </a:solidFill>
+                <a:latin typeface="Arial"/>
+              </a:rPr>
+              <a:t>Quando tristezas como ondas do mar me rolam</a:t>
             </a:r>
           </a:p>
         </p:txBody>
@@ -5473,8 +5263,8 @@
         </p:nvSpPr>
         <p:spPr>
           <a:xfrm>
-            <a:off x="594360" y="4672584"/>
-            <a:ext cx="11002975" cy="347472"/>
+            <a:off x="640080" y="4896612"/>
+            <a:ext cx="10911535" cy="310896"/>
           </a:xfrm>
           <a:prstGeom prst="rect">
             <a:avLst/>
@@ -5491,11 +5281,11 @@
             <a:r>
               <a:rPr sz="2000" b="0" i="1">
                 <a:solidFill>
-                  <a:srgbClr val="8C8C8C"/>
-                </a:solidFill>
-                <a:latin typeface="Arial"/>
-              </a:rPr>
-              <a:t/>
+                  <a:srgbClr val="828282"/>
+                </a:solidFill>
+                <a:latin typeface="Arial"/>
+              </a:rPr>
+              <a:t>O que quer que seja minha sorte, aprendi a dizer</a:t>
             </a:r>
           </a:p>
         </p:txBody>
@@ -5534,23 +5324,23 @@
         </p:nvSpPr>
         <p:spPr>
           <a:xfrm>
-            <a:off x="594360" y="2258568"/>
-            <a:ext cx="11002975" cy="685800"/>
-          </a:xfrm>
-          <a:prstGeom prst="rect">
-            <a:avLst/>
-          </a:prstGeom>
-          <a:noFill/>
-        </p:spPr>
-        <p:txBody>
-          <a:bodyPr wrap="square">
-            <a:spAutoFit/>
-          </a:bodyPr>
-          <a:lstStyle/>
-          <a:p>
-            <a:pPr algn="ctr"/>
-            <a:r>
-              <a:rPr sz="4400" b="1" i="0">
+            <a:off x="640080" y="2052828"/>
+            <a:ext cx="10911535" cy="731520"/>
+          </a:xfrm>
+          <a:prstGeom prst="rect">
+            <a:avLst/>
+          </a:prstGeom>
+          <a:noFill/>
+        </p:spPr>
+        <p:txBody>
+          <a:bodyPr wrap="square">
+            <a:spAutoFit/>
+          </a:bodyPr>
+          <a:lstStyle/>
+          <a:p>
+            <a:pPr algn="ctr"/>
+            <a:r>
+              <a:rPr sz="4800" b="1" i="0">
                 <a:solidFill>
                   <a:srgbClr val="FFFFFF"/>
                 </a:solidFill>
@@ -5569,29 +5359,29 @@
         </p:nvSpPr>
         <p:spPr>
           <a:xfrm>
-            <a:off x="594360" y="2980944"/>
-            <a:ext cx="11002975" cy="347472"/>
-          </a:xfrm>
-          <a:prstGeom prst="rect">
-            <a:avLst/>
-          </a:prstGeom>
-          <a:noFill/>
-        </p:spPr>
-        <p:txBody>
-          <a:bodyPr wrap="square">
-            <a:spAutoFit/>
-          </a:bodyPr>
-          <a:lstStyle/>
-          <a:p>
-            <a:pPr algn="ctr"/>
-            <a:r>
-              <a:rPr sz="2200" b="0" i="1">
-                <a:solidFill>
-                  <a:srgbClr val="8C8C8C"/>
-                </a:solidFill>
-                <a:latin typeface="Arial"/>
-              </a:rPr>
-              <a:t/>
+            <a:off x="640080" y="2985516"/>
+            <a:ext cx="10911535" cy="731520"/>
+          </a:xfrm>
+          <a:prstGeom prst="rect">
+            <a:avLst/>
+          </a:prstGeom>
+          <a:noFill/>
+        </p:spPr>
+        <p:txBody>
+          <a:bodyPr wrap="square">
+            <a:spAutoFit/>
+          </a:bodyPr>
+          <a:lstStyle/>
+          <a:p>
+            <a:pPr algn="ctr"/>
+            <a:r>
+              <a:rPr sz="3300" b="1" i="0">
+                <a:solidFill>
+                  <a:srgbClr val="FFFFFF"/>
+                </a:solidFill>
+                <a:latin typeface="Arial"/>
+              </a:rPr>
+              <a:t>Quando a paz como um rio acompanha meu caminho</a:t>
             </a:r>
           </a:p>
         </p:txBody>
@@ -5604,29 +5394,29 @@
         </p:nvSpPr>
         <p:spPr>
           <a:xfrm>
-            <a:off x="594360" y="3529584"/>
-            <a:ext cx="11002975" cy="685800"/>
-          </a:xfrm>
-          <a:prstGeom prst="rect">
-            <a:avLst/>
-          </a:prstGeom>
-          <a:noFill/>
-        </p:spPr>
-        <p:txBody>
-          <a:bodyPr wrap="square">
-            <a:spAutoFit/>
-          </a:bodyPr>
-          <a:lstStyle/>
-          <a:p>
-            <a:pPr algn="ctr"/>
-            <a:r>
-              <a:rPr sz="3060" b="1" i="0">
-                <a:solidFill>
-                  <a:srgbClr val="FFFFFF"/>
-                </a:solidFill>
-                <a:latin typeface="Arial"/>
-              </a:rPr>
-              <a:t>Quando a paz como um rio acompanha meu caminho</a:t>
+            <a:off x="640080" y="4128516"/>
+            <a:ext cx="10911535" cy="310896"/>
+          </a:xfrm>
+          <a:prstGeom prst="rect">
+            <a:avLst/>
+          </a:prstGeom>
+          <a:noFill/>
+        </p:spPr>
+        <p:txBody>
+          <a:bodyPr wrap="square">
+            <a:spAutoFit/>
+          </a:bodyPr>
+          <a:lstStyle/>
+          <a:p>
+            <a:pPr algn="ctr"/>
+            <a:r>
+              <a:rPr sz="2000" b="0" i="0">
+                <a:solidFill>
+                  <a:srgbClr val="828282"/>
+                </a:solidFill>
+                <a:latin typeface="Arial"/>
+              </a:rPr>
+              <a:t>安らかな 流れの とき-も</a:t>
             </a:r>
           </a:p>
         </p:txBody>
@@ -5639,29 +5429,29 @@
         </p:nvSpPr>
         <p:spPr>
           <a:xfrm>
-            <a:off x="594360" y="4251960"/>
-            <a:ext cx="11002975" cy="347472"/>
-          </a:xfrm>
-          <a:prstGeom prst="rect">
-            <a:avLst/>
-          </a:prstGeom>
-          <a:noFill/>
-        </p:spPr>
-        <p:txBody>
-          <a:bodyPr wrap="square">
-            <a:spAutoFit/>
-          </a:bodyPr>
-          <a:lstStyle/>
-          <a:p>
-            <a:pPr algn="ctr"/>
-            <a:r>
-              <a:rPr sz="2200" b="0" i="1">
-                <a:solidFill>
-                  <a:srgbClr val="8C8C8C"/>
-                </a:solidFill>
-                <a:latin typeface="Arial"/>
-              </a:rPr>
-              <a:t/>
+            <a:off x="640080" y="4494276"/>
+            <a:ext cx="10911535" cy="310896"/>
+          </a:xfrm>
+          <a:prstGeom prst="rect">
+            <a:avLst/>
+          </a:prstGeom>
+          <a:noFill/>
+        </p:spPr>
+        <p:txBody>
+          <a:bodyPr wrap="square">
+            <a:spAutoFit/>
+          </a:bodyPr>
+          <a:lstStyle/>
+          <a:p>
+            <a:pPr algn="ctr"/>
+            <a:r>
+              <a:rPr sz="2000" b="0" i="0">
+                <a:solidFill>
+                  <a:srgbClr val="828282"/>
+                </a:solidFill>
+                <a:latin typeface="Arial"/>
+              </a:rPr>
+              <a:t>悲しみ 　の 　波も</a:t>
             </a:r>
           </a:p>
         </p:txBody>
@@ -5700,23 +5490,23 @@
         </p:nvSpPr>
         <p:spPr>
           <a:xfrm>
-            <a:off x="594360" y="2258568"/>
-            <a:ext cx="11002975" cy="685800"/>
-          </a:xfrm>
-          <a:prstGeom prst="rect">
-            <a:avLst/>
-          </a:prstGeom>
-          <a:noFill/>
-        </p:spPr>
-        <p:txBody>
-          <a:bodyPr wrap="square">
-            <a:spAutoFit/>
-          </a:bodyPr>
-          <a:lstStyle/>
-          <a:p>
-            <a:pPr algn="ctr"/>
-            <a:r>
-              <a:rPr sz="3274" b="1" i="0">
+            <a:off x="640080" y="2052828"/>
+            <a:ext cx="10911535" cy="731520"/>
+          </a:xfrm>
+          <a:prstGeom prst="rect">
+            <a:avLst/>
+          </a:prstGeom>
+          <a:noFill/>
+        </p:spPr>
+        <p:txBody>
+          <a:bodyPr wrap="square">
+            <a:spAutoFit/>
+          </a:bodyPr>
+          <a:lstStyle/>
+          <a:p>
+            <a:pPr algn="ctr"/>
+            <a:r>
+              <a:rPr sz="3500" b="1" i="0">
                 <a:solidFill>
                   <a:srgbClr val="FFFFFF"/>
                 </a:solidFill>
@@ -5735,29 +5525,29 @@
         </p:nvSpPr>
         <p:spPr>
           <a:xfrm>
-            <a:off x="594360" y="2980944"/>
-            <a:ext cx="11002975" cy="347472"/>
-          </a:xfrm>
-          <a:prstGeom prst="rect">
-            <a:avLst/>
-          </a:prstGeom>
-          <a:noFill/>
-        </p:spPr>
-        <p:txBody>
-          <a:bodyPr wrap="square">
-            <a:spAutoFit/>
-          </a:bodyPr>
-          <a:lstStyle/>
-          <a:p>
-            <a:pPr algn="ctr"/>
-            <a:r>
-              <a:rPr sz="2200" b="0" i="1">
-                <a:solidFill>
-                  <a:srgbClr val="8C8C8C"/>
-                </a:solidFill>
-                <a:latin typeface="Arial"/>
-              </a:rPr>
-              <a:t/>
+            <a:off x="640080" y="2985516"/>
+            <a:ext cx="10911535" cy="731520"/>
+          </a:xfrm>
+          <a:prstGeom prst="rect">
+            <a:avLst/>
+          </a:prstGeom>
+          <a:noFill/>
+        </p:spPr>
+        <p:txBody>
+          <a:bodyPr wrap="square">
+            <a:spAutoFit/>
+          </a:bodyPr>
+          <a:lstStyle/>
+          <a:p>
+            <a:pPr algn="ctr"/>
+            <a:r>
+              <a:rPr sz="3200" b="1" i="0">
+                <a:solidFill>
+                  <a:srgbClr val="FFFFFF"/>
+                </a:solidFill>
+                <a:latin typeface="Arial"/>
+              </a:rPr>
+              <a:t>O que quer que seja minha sorte, aprendi a dizer</a:t>
             </a:r>
           </a:p>
         </p:txBody>
@@ -5770,29 +5560,29 @@
         </p:nvSpPr>
         <p:spPr>
           <a:xfrm>
-            <a:off x="594360" y="3529584"/>
-            <a:ext cx="11002975" cy="685800"/>
-          </a:xfrm>
-          <a:prstGeom prst="rect">
-            <a:avLst/>
-          </a:prstGeom>
-          <a:noFill/>
-        </p:spPr>
-        <p:txBody>
-          <a:bodyPr wrap="square">
-            <a:spAutoFit/>
-          </a:bodyPr>
-          <a:lstStyle/>
-          <a:p>
-            <a:pPr algn="ctr"/>
-            <a:r>
-              <a:rPr sz="2933" b="1" i="0">
-                <a:solidFill>
-                  <a:srgbClr val="FFFFFF"/>
-                </a:solidFill>
-                <a:latin typeface="Arial"/>
-              </a:rPr>
-              <a:t>O que quer que seja minha sorte, aprendi a dizer</a:t>
+            <a:off x="640080" y="4128516"/>
+            <a:ext cx="10911535" cy="310896"/>
+          </a:xfrm>
+          <a:prstGeom prst="rect">
+            <a:avLst/>
+          </a:prstGeom>
+          <a:noFill/>
+        </p:spPr>
+        <p:txBody>
+          <a:bodyPr wrap="square">
+            <a:spAutoFit/>
+          </a:bodyPr>
+          <a:lstStyle/>
+          <a:p>
+            <a:pPr algn="ctr"/>
+            <a:r>
+              <a:rPr sz="2000" b="0" i="0">
+                <a:solidFill>
+                  <a:srgbClr val="828282"/>
+                </a:solidFill>
+                <a:latin typeface="Arial"/>
+              </a:rPr>
+              <a:t>主にあれ-ば　みな 喜-び</a:t>
             </a:r>
           </a:p>
         </p:txBody>
@@ -5805,29 +5595,29 @@
         </p:nvSpPr>
         <p:spPr>
           <a:xfrm>
-            <a:off x="594360" y="4251960"/>
-            <a:ext cx="11002975" cy="347472"/>
-          </a:xfrm>
-          <a:prstGeom prst="rect">
-            <a:avLst/>
-          </a:prstGeom>
-          <a:noFill/>
-        </p:spPr>
-        <p:txBody>
-          <a:bodyPr wrap="square">
-            <a:spAutoFit/>
-          </a:bodyPr>
-          <a:lstStyle/>
-          <a:p>
-            <a:pPr algn="ctr"/>
-            <a:r>
-              <a:rPr sz="2200" b="0" i="1">
-                <a:solidFill>
-                  <a:srgbClr val="8C8C8C"/>
-                </a:solidFill>
-                <a:latin typeface="Arial"/>
-              </a:rPr>
-              <a:t/>
+            <a:off x="640080" y="4494276"/>
+            <a:ext cx="10911535" cy="310896"/>
+          </a:xfrm>
+          <a:prstGeom prst="rect">
+            <a:avLst/>
+          </a:prstGeom>
+          <a:noFill/>
+        </p:spPr>
+        <p:txBody>
+          <a:bodyPr wrap="square">
+            <a:spAutoFit/>
+          </a:bodyPr>
+          <a:lstStyle/>
+          <a:p>
+            <a:pPr algn="ctr"/>
+            <a:r>
+              <a:rPr sz="2000" b="0" i="0">
+                <a:solidFill>
+                  <a:srgbClr val="828282"/>
+                </a:solidFill>
+                <a:latin typeface="Arial"/>
+              </a:rPr>
+              <a:t>こころ　　満たす 平-和</a:t>
             </a:r>
           </a:p>
         </p:txBody>
@@ -5866,64 +5656,29 @@
         </p:nvSpPr>
         <p:spPr>
           <a:xfrm>
-            <a:off x="594360" y="2894076"/>
-            <a:ext cx="11002975" cy="685800"/>
-          </a:xfrm>
-          <a:prstGeom prst="rect">
-            <a:avLst/>
-          </a:prstGeom>
-          <a:noFill/>
-        </p:spPr>
-        <p:txBody>
-          <a:bodyPr wrap="square">
-            <a:spAutoFit/>
-          </a:bodyPr>
-          <a:lstStyle/>
-          <a:p>
-            <a:pPr algn="ctr"/>
-            <a:r>
-              <a:rPr sz="4022" b="1" i="0">
+            <a:off x="640080" y="2702052"/>
+            <a:ext cx="10911535" cy="731520"/>
+          </a:xfrm>
+          <a:prstGeom prst="rect">
+            <a:avLst/>
+          </a:prstGeom>
+          <a:noFill/>
+        </p:spPr>
+        <p:txBody>
+          <a:bodyPr wrap="square">
+            <a:spAutoFit/>
+          </a:bodyPr>
+          <a:lstStyle/>
+          <a:p>
+            <a:pPr algn="ctr"/>
+            <a:r>
+              <a:rPr sz="4300" b="1" i="0">
                 <a:solidFill>
                   <a:srgbClr val="FFFFFF"/>
                 </a:solidFill>
                 <a:latin typeface="Arial"/>
               </a:rPr>
               <a:t>Está bem, está bem com a minha alma</a:t>
-            </a:r>
-          </a:p>
-        </p:txBody>
-      </p:sp>
-      <p:sp>
-        <p:nvSpPr>
-          <p:cNvPr id="3" name="TextBox 2"/>
-          <p:cNvSpPr txBox="1"/>
-          <p:nvPr/>
-        </p:nvSpPr>
-        <p:spPr>
-          <a:xfrm>
-            <a:off x="594360" y="3616452"/>
-            <a:ext cx="11002975" cy="347472"/>
-          </a:xfrm>
-          <a:prstGeom prst="rect">
-            <a:avLst/>
-          </a:prstGeom>
-          <a:noFill/>
-        </p:spPr>
-        <p:txBody>
-          <a:bodyPr wrap="square">
-            <a:spAutoFit/>
-          </a:bodyPr>
-          <a:lstStyle/>
-          <a:p>
-            <a:pPr algn="ctr"/>
-            <a:r>
-              <a:rPr sz="2200" b="0" i="1">
-                <a:solidFill>
-                  <a:srgbClr val="8C8C8C"/>
-                </a:solidFill>
-                <a:latin typeface="Arial"/>
-              </a:rPr>
-              <a:t/>
             </a:r>
           </a:p>
         </p:txBody>
@@ -5962,23 +5717,23 @@
         </p:nvSpPr>
         <p:spPr>
           <a:xfrm>
-            <a:off x="594360" y="2258568"/>
-            <a:ext cx="11002975" cy="685800"/>
-          </a:xfrm>
-          <a:prstGeom prst="rect">
-            <a:avLst/>
-          </a:prstGeom>
-          <a:noFill/>
-        </p:spPr>
-        <p:txBody>
-          <a:bodyPr wrap="square">
-            <a:spAutoFit/>
-          </a:bodyPr>
-          <a:lstStyle/>
-          <a:p>
-            <a:pPr algn="ctr"/>
-            <a:r>
-              <a:rPr sz="2873" b="1" i="0">
+            <a:off x="640080" y="2052828"/>
+            <a:ext cx="10911535" cy="731520"/>
+          </a:xfrm>
+          <a:prstGeom prst="rect">
+            <a:avLst/>
+          </a:prstGeom>
+          <a:noFill/>
+        </p:spPr>
+        <p:txBody>
+          <a:bodyPr wrap="square">
+            <a:spAutoFit/>
+          </a:bodyPr>
+          <a:lstStyle/>
+          <a:p>
+            <a:pPr algn="ctr"/>
+            <a:r>
+              <a:rPr sz="3100" b="1" i="0">
                 <a:solidFill>
                   <a:srgbClr val="FFFFFF"/>
                 </a:solidFill>
@@ -5997,29 +5752,29 @@
         </p:nvSpPr>
         <p:spPr>
           <a:xfrm>
-            <a:off x="594360" y="2980944"/>
-            <a:ext cx="11002975" cy="347472"/>
-          </a:xfrm>
-          <a:prstGeom prst="rect">
-            <a:avLst/>
-          </a:prstGeom>
-          <a:noFill/>
-        </p:spPr>
-        <p:txBody>
-          <a:bodyPr wrap="square">
-            <a:spAutoFit/>
-          </a:bodyPr>
-          <a:lstStyle/>
-          <a:p>
-            <a:pPr algn="ctr"/>
-            <a:r>
-              <a:rPr sz="2200" b="0" i="1">
-                <a:solidFill>
-                  <a:srgbClr val="8C8C8C"/>
-                </a:solidFill>
-                <a:latin typeface="Arial"/>
-              </a:rPr>
-              <a:t/>
+            <a:off x="640080" y="2985516"/>
+            <a:ext cx="10911535" cy="731520"/>
+          </a:xfrm>
+          <a:prstGeom prst="rect">
+            <a:avLst/>
+          </a:prstGeom>
+          <a:noFill/>
+        </p:spPr>
+        <p:txBody>
+          <a:bodyPr wrap="square">
+            <a:spAutoFit/>
+          </a:bodyPr>
+          <a:lstStyle/>
+          <a:p>
+            <a:pPr algn="ctr"/>
+            <a:r>
+              <a:rPr sz="4500" b="1" i="0">
+                <a:solidFill>
+                  <a:srgbClr val="FFFFFF"/>
+                </a:solidFill>
+                <a:latin typeface="Arial"/>
+              </a:rPr>
+              <a:t>Meu pecado, não em parte, mas todo</a:t>
             </a:r>
           </a:p>
         </p:txBody>
@@ -6032,29 +5787,29 @@
         </p:nvSpPr>
         <p:spPr>
           <a:xfrm>
-            <a:off x="594360" y="3529584"/>
-            <a:ext cx="11002975" cy="685800"/>
-          </a:xfrm>
-          <a:prstGeom prst="rect">
-            <a:avLst/>
-          </a:prstGeom>
-          <a:noFill/>
-        </p:spPr>
-        <p:txBody>
-          <a:bodyPr wrap="square">
-            <a:spAutoFit/>
-          </a:bodyPr>
-          <a:lstStyle/>
-          <a:p>
-            <a:pPr algn="ctr"/>
-            <a:r>
-              <a:rPr sz="4141" b="1" i="0">
-                <a:solidFill>
-                  <a:srgbClr val="FFFFFF"/>
-                </a:solidFill>
-                <a:latin typeface="Arial"/>
-              </a:rPr>
-              <a:t>Meu pecado, não em parte, mas todo</a:t>
+            <a:off x="640080" y="4128516"/>
+            <a:ext cx="10911535" cy="310896"/>
+          </a:xfrm>
+          <a:prstGeom prst="rect">
+            <a:avLst/>
+          </a:prstGeom>
+          <a:noFill/>
+        </p:spPr>
+        <p:txBody>
+          <a:bodyPr wrap="square">
+            <a:spAutoFit/>
+          </a:bodyPr>
+          <a:lstStyle/>
+          <a:p>
+            <a:pPr algn="ctr"/>
+            <a:r>
+              <a:rPr sz="2000" b="0" i="0">
+                <a:solidFill>
+                  <a:srgbClr val="828282"/>
+                </a:solidFill>
+                <a:latin typeface="Arial"/>
+              </a:rPr>
+              <a:t>心     (こころ)       満たす    (みたす)</a:t>
             </a:r>
           </a:p>
         </p:txBody>
@@ -6067,29 +5822,29 @@
         </p:nvSpPr>
         <p:spPr>
           <a:xfrm>
-            <a:off x="594360" y="4251960"/>
-            <a:ext cx="11002975" cy="347472"/>
-          </a:xfrm>
-          <a:prstGeom prst="rect">
-            <a:avLst/>
-          </a:prstGeom>
-          <a:noFill/>
-        </p:spPr>
-        <p:txBody>
-          <a:bodyPr wrap="square">
-            <a:spAutoFit/>
-          </a:bodyPr>
-          <a:lstStyle/>
-          <a:p>
-            <a:pPr algn="ctr"/>
-            <a:r>
-              <a:rPr sz="2200" b="0" i="1">
-                <a:solidFill>
-                  <a:srgbClr val="8C8C8C"/>
-                </a:solidFill>
-                <a:latin typeface="Arial"/>
-              </a:rPr>
-              <a:t/>
+            <a:off x="640080" y="4494276"/>
+            <a:ext cx="10911535" cy="310896"/>
+          </a:xfrm>
+          <a:prstGeom prst="rect">
+            <a:avLst/>
+          </a:prstGeom>
+          <a:noFill/>
+        </p:spPr>
+        <p:txBody>
+          <a:bodyPr wrap="square">
+            <a:spAutoFit/>
+          </a:bodyPr>
+          <a:lstStyle/>
+          <a:p>
+            <a:pPr algn="ctr"/>
+            <a:r>
+              <a:rPr sz="2000" b="0" i="0">
+                <a:solidFill>
+                  <a:srgbClr val="828282"/>
+                </a:solidFill>
+                <a:latin typeface="Arial"/>
+              </a:rPr>
+              <a:t>こころ　みたす　へいわ</a:t>
             </a:r>
           </a:p>
         </p:txBody>
@@ -6128,23 +5883,23 @@
         </p:nvSpPr>
         <p:spPr>
           <a:xfrm>
-            <a:off x="594360" y="2258568"/>
-            <a:ext cx="11002975" cy="685800"/>
-          </a:xfrm>
-          <a:prstGeom prst="rect">
-            <a:avLst/>
-          </a:prstGeom>
-          <a:noFill/>
-        </p:spPr>
-        <p:txBody>
-          <a:bodyPr wrap="square">
-            <a:spAutoFit/>
-          </a:bodyPr>
-          <a:lstStyle/>
-          <a:p>
-            <a:pPr algn="ctr"/>
-            <a:r>
-              <a:rPr sz="3434" b="1" i="0">
+            <a:off x="640080" y="2052828"/>
+            <a:ext cx="10911535" cy="731520"/>
+          </a:xfrm>
+          <a:prstGeom prst="rect">
+            <a:avLst/>
+          </a:prstGeom>
+          <a:noFill/>
+        </p:spPr>
+        <p:txBody>
+          <a:bodyPr wrap="square">
+            <a:spAutoFit/>
+          </a:bodyPr>
+          <a:lstStyle/>
+          <a:p>
+            <a:pPr algn="ctr"/>
+            <a:r>
+              <a:rPr sz="3700" b="1" i="0">
                 <a:solidFill>
                   <a:srgbClr val="FFFFFF"/>
                 </a:solidFill>
@@ -6163,29 +5918,29 @@
         </p:nvSpPr>
         <p:spPr>
           <a:xfrm>
-            <a:off x="594360" y="2980944"/>
-            <a:ext cx="11002975" cy="347472"/>
-          </a:xfrm>
-          <a:prstGeom prst="rect">
-            <a:avLst/>
-          </a:prstGeom>
-          <a:noFill/>
-        </p:spPr>
-        <p:txBody>
-          <a:bodyPr wrap="square">
-            <a:spAutoFit/>
-          </a:bodyPr>
-          <a:lstStyle/>
-          <a:p>
-            <a:pPr algn="ctr"/>
-            <a:r>
-              <a:rPr sz="2200" b="0" i="1">
-                <a:solidFill>
-                  <a:srgbClr val="8C8C8C"/>
-                </a:solidFill>
-                <a:latin typeface="Arial"/>
-              </a:rPr>
-              <a:t/>
+            <a:off x="640080" y="2985516"/>
+            <a:ext cx="10911535" cy="731520"/>
+          </a:xfrm>
+          <a:prstGeom prst="rect">
+            <a:avLst/>
+          </a:prstGeom>
+          <a:noFill/>
+        </p:spPr>
+        <p:txBody>
+          <a:bodyPr wrap="square">
+            <a:spAutoFit/>
+          </a:bodyPr>
+          <a:lstStyle/>
+          <a:p>
+            <a:pPr algn="ctr"/>
+            <a:r>
+              <a:rPr sz="4800" b="1" i="0">
+                <a:solidFill>
+                  <a:srgbClr val="FFFFFF"/>
+                </a:solidFill>
+                <a:latin typeface="Arial"/>
+              </a:rPr>
+              <a:t>E o Senhor descerá</a:t>
             </a:r>
           </a:p>
         </p:txBody>
@@ -6198,29 +5953,29 @@
         </p:nvSpPr>
         <p:spPr>
           <a:xfrm>
-            <a:off x="594360" y="3529584"/>
-            <a:ext cx="11002975" cy="685800"/>
-          </a:xfrm>
-          <a:prstGeom prst="rect">
-            <a:avLst/>
-          </a:prstGeom>
-          <a:noFill/>
-        </p:spPr>
-        <p:txBody>
-          <a:bodyPr wrap="square">
-            <a:spAutoFit/>
-          </a:bodyPr>
-          <a:lstStyle/>
-          <a:p>
-            <a:pPr algn="ctr"/>
-            <a:r>
-              <a:rPr sz="4400" b="1" i="0">
-                <a:solidFill>
-                  <a:srgbClr val="FFFFFF"/>
-                </a:solidFill>
-                <a:latin typeface="Arial"/>
-              </a:rPr>
-              <a:t>E o Senhor descerá</a:t>
+            <a:off x="640080" y="4128516"/>
+            <a:ext cx="10911535" cy="310896"/>
+          </a:xfrm>
+          <a:prstGeom prst="rect">
+            <a:avLst/>
+          </a:prstGeom>
+          <a:noFill/>
+        </p:spPr>
+        <p:txBody>
+          <a:bodyPr wrap="square">
+            <a:spAutoFit/>
+          </a:bodyPr>
+          <a:lstStyle/>
+          <a:p>
+            <a:pPr algn="ctr"/>
+            <a:r>
+              <a:rPr sz="2000" b="0" i="0">
+                <a:solidFill>
+                  <a:srgbClr val="828282"/>
+                </a:solidFill>
+                <a:latin typeface="Arial"/>
+              </a:rPr>
+              <a:t>心     (こころ)       満たす    (みたす)</a:t>
             </a:r>
           </a:p>
         </p:txBody>
@@ -6233,29 +5988,29 @@
         </p:nvSpPr>
         <p:spPr>
           <a:xfrm>
-            <a:off x="594360" y="4251960"/>
-            <a:ext cx="11002975" cy="347472"/>
-          </a:xfrm>
-          <a:prstGeom prst="rect">
-            <a:avLst/>
-          </a:prstGeom>
-          <a:noFill/>
-        </p:spPr>
-        <p:txBody>
-          <a:bodyPr wrap="square">
-            <a:spAutoFit/>
-          </a:bodyPr>
-          <a:lstStyle/>
-          <a:p>
-            <a:pPr algn="ctr"/>
-            <a:r>
-              <a:rPr sz="2200" b="0" i="1">
-                <a:solidFill>
-                  <a:srgbClr val="8C8C8C"/>
-                </a:solidFill>
-                <a:latin typeface="Arial"/>
-              </a:rPr>
-              <a:t/>
+            <a:off x="640080" y="4494276"/>
+            <a:ext cx="10911535" cy="310896"/>
+          </a:xfrm>
+          <a:prstGeom prst="rect">
+            <a:avLst/>
+          </a:prstGeom>
+          <a:noFill/>
+        </p:spPr>
+        <p:txBody>
+          <a:bodyPr wrap="square">
+            <a:spAutoFit/>
+          </a:bodyPr>
+          <a:lstStyle/>
+          <a:p>
+            <a:pPr algn="ctr"/>
+            <a:r>
+              <a:rPr sz="2000" b="0" i="0">
+                <a:solidFill>
+                  <a:srgbClr val="828282"/>
+                </a:solidFill>
+                <a:latin typeface="Arial"/>
+              </a:rPr>
+              <a:t>こころ　みたす　へいわ</a:t>
             </a:r>
           </a:p>
         </p:txBody>
@@ -6294,23 +6049,23 @@
         </p:nvSpPr>
         <p:spPr>
           <a:xfrm>
-            <a:off x="594360" y="2258568"/>
-            <a:ext cx="11002975" cy="685800"/>
-          </a:xfrm>
-          <a:prstGeom prst="rect">
-            <a:avLst/>
-          </a:prstGeom>
-          <a:noFill/>
-        </p:spPr>
-        <p:txBody>
-          <a:bodyPr wrap="square">
-            <a:spAutoFit/>
-          </a:bodyPr>
-          <a:lstStyle/>
-          <a:p>
-            <a:pPr algn="ctr"/>
-            <a:r>
-              <a:rPr sz="4141" b="1" i="0">
+            <a:off x="640080" y="2052828"/>
+            <a:ext cx="10911535" cy="731520"/>
+          </a:xfrm>
+          <a:prstGeom prst="rect">
+            <a:avLst/>
+          </a:prstGeom>
+          <a:noFill/>
+        </p:spPr>
+        <p:txBody>
+          <a:bodyPr wrap="square">
+            <a:spAutoFit/>
+          </a:bodyPr>
+          <a:lstStyle/>
+          <a:p>
+            <a:pPr algn="ctr"/>
+            <a:r>
+              <a:rPr sz="4500" b="1" i="0">
                 <a:solidFill>
                   <a:srgbClr val="FFFFFF"/>
                 </a:solidFill>
@@ -6329,29 +6084,29 @@
         </p:nvSpPr>
         <p:spPr>
           <a:xfrm>
-            <a:off x="594360" y="2980944"/>
-            <a:ext cx="11002975" cy="347472"/>
-          </a:xfrm>
-          <a:prstGeom prst="rect">
-            <a:avLst/>
-          </a:prstGeom>
-          <a:noFill/>
-        </p:spPr>
-        <p:txBody>
-          <a:bodyPr wrap="square">
-            <a:spAutoFit/>
-          </a:bodyPr>
-          <a:lstStyle/>
-          <a:p>
-            <a:pPr algn="ctr"/>
-            <a:r>
-              <a:rPr sz="2200" b="0" i="1">
-                <a:solidFill>
-                  <a:srgbClr val="8C8C8C"/>
-                </a:solidFill>
-                <a:latin typeface="Arial"/>
-              </a:rPr>
-              <a:t/>
+            <a:off x="640080" y="2985516"/>
+            <a:ext cx="10911535" cy="731520"/>
+          </a:xfrm>
+          <a:prstGeom prst="rect">
+            <a:avLst/>
+          </a:prstGeom>
+          <a:noFill/>
+        </p:spPr>
+        <p:txBody>
+          <a:bodyPr wrap="square">
+            <a:spAutoFit/>
+          </a:bodyPr>
+          <a:lstStyle/>
+          <a:p>
+            <a:pPr algn="ctr"/>
+            <a:r>
+              <a:rPr sz="4800" b="1" i="0">
+                <a:solidFill>
+                  <a:srgbClr val="FFFFFF"/>
+                </a:solidFill>
+                <a:latin typeface="Arial"/>
+              </a:rPr>
+              <a:t>E o Senhor descerá</a:t>
             </a:r>
           </a:p>
         </p:txBody>
@@ -6364,29 +6119,29 @@
         </p:nvSpPr>
         <p:spPr>
           <a:xfrm>
-            <a:off x="594360" y="3529584"/>
-            <a:ext cx="11002975" cy="685800"/>
-          </a:xfrm>
-          <a:prstGeom prst="rect">
-            <a:avLst/>
-          </a:prstGeom>
-          <a:noFill/>
-        </p:spPr>
-        <p:txBody>
-          <a:bodyPr wrap="square">
-            <a:spAutoFit/>
-          </a:bodyPr>
-          <a:lstStyle/>
-          <a:p>
-            <a:pPr algn="ctr"/>
-            <a:r>
-              <a:rPr sz="4400" b="1" i="0">
-                <a:solidFill>
-                  <a:srgbClr val="FFFFFF"/>
-                </a:solidFill>
-                <a:latin typeface="Arial"/>
-              </a:rPr>
-              <a:t>E o Senhor descerá</a:t>
+            <a:off x="640080" y="4128516"/>
+            <a:ext cx="10911535" cy="310896"/>
+          </a:xfrm>
+          <a:prstGeom prst="rect">
+            <a:avLst/>
+          </a:prstGeom>
+          <a:noFill/>
+        </p:spPr>
+        <p:txBody>
+          <a:bodyPr wrap="square">
+            <a:spAutoFit/>
+          </a:bodyPr>
+          <a:lstStyle/>
+          <a:p>
+            <a:pPr algn="ctr"/>
+            <a:r>
+              <a:rPr sz="2000" b="0" i="0">
+                <a:solidFill>
+                  <a:srgbClr val="828282"/>
+                </a:solidFill>
+                <a:latin typeface="Arial"/>
+              </a:rPr>
+              <a:t>心     (こころ)       満たす    (みたす)</a:t>
             </a:r>
           </a:p>
         </p:txBody>
@@ -6399,29 +6154,29 @@
         </p:nvSpPr>
         <p:spPr>
           <a:xfrm>
-            <a:off x="594360" y="4251960"/>
-            <a:ext cx="11002975" cy="347472"/>
-          </a:xfrm>
-          <a:prstGeom prst="rect">
-            <a:avLst/>
-          </a:prstGeom>
-          <a:noFill/>
-        </p:spPr>
-        <p:txBody>
-          <a:bodyPr wrap="square">
-            <a:spAutoFit/>
-          </a:bodyPr>
-          <a:lstStyle/>
-          <a:p>
-            <a:pPr algn="ctr"/>
-            <a:r>
-              <a:rPr sz="2200" b="0" i="1">
-                <a:solidFill>
-                  <a:srgbClr val="8C8C8C"/>
-                </a:solidFill>
-                <a:latin typeface="Arial"/>
-              </a:rPr>
-              <a:t/>
+            <a:off x="640080" y="4494276"/>
+            <a:ext cx="10911535" cy="310896"/>
+          </a:xfrm>
+          <a:prstGeom prst="rect">
+            <a:avLst/>
+          </a:prstGeom>
+          <a:noFill/>
+        </p:spPr>
+        <p:txBody>
+          <a:bodyPr wrap="square">
+            <a:spAutoFit/>
+          </a:bodyPr>
+          <a:lstStyle/>
+          <a:p>
+            <a:pPr algn="ctr"/>
+            <a:r>
+              <a:rPr sz="2000" b="0" i="0">
+                <a:solidFill>
+                  <a:srgbClr val="828282"/>
+                </a:solidFill>
+                <a:latin typeface="Arial"/>
+              </a:rPr>
+              <a:t>こころ　みたす　へいわ</a:t>
             </a:r>
           </a:p>
         </p:txBody>
@@ -6460,23 +6215,23 @@
         </p:nvSpPr>
         <p:spPr>
           <a:xfrm>
-            <a:off x="594360" y="1837944"/>
-            <a:ext cx="11002975" cy="685800"/>
-          </a:xfrm>
-          <a:prstGeom prst="rect">
-            <a:avLst/>
-          </a:prstGeom>
-          <a:noFill/>
-        </p:spPr>
-        <p:txBody>
-          <a:bodyPr wrap="square">
-            <a:spAutoFit/>
-          </a:bodyPr>
-          <a:lstStyle/>
-          <a:p>
-            <a:pPr algn="ctr"/>
-            <a:r>
-              <a:rPr sz="3520" b="1" i="0">
+            <a:off x="640080" y="1650492"/>
+            <a:ext cx="10911535" cy="731520"/>
+          </a:xfrm>
+          <a:prstGeom prst="rect">
+            <a:avLst/>
+          </a:prstGeom>
+          <a:noFill/>
+        </p:spPr>
+        <p:txBody>
+          <a:bodyPr wrap="square">
+            <a:spAutoFit/>
+          </a:bodyPr>
+          <a:lstStyle/>
+          <a:p>
+            <a:pPr algn="ctr"/>
+            <a:r>
+              <a:rPr sz="3800" b="1" i="0">
                 <a:solidFill>
                   <a:srgbClr val="FFFFFF"/>
                 </a:solidFill>
@@ -6495,8 +6250,8 @@
         </p:nvSpPr>
         <p:spPr>
           <a:xfrm>
-            <a:off x="594360" y="2560320"/>
-            <a:ext cx="11002975" cy="384048"/>
+            <a:off x="640080" y="2418588"/>
+            <a:ext cx="10911535" cy="365760"/>
           </a:xfrm>
           <a:prstGeom prst="rect">
             <a:avLst/>
@@ -6513,7 +6268,7 @@
             <a:r>
               <a:rPr sz="2400" b="0" i="1">
                 <a:solidFill>
-                  <a:srgbClr val="B4B4B4"/>
+                  <a:srgbClr val="AAAAAA"/>
                 </a:solidFill>
                 <a:latin typeface="Arial"/>
               </a:rPr>
@@ -6530,8 +6285,78 @@
         </p:nvSpPr>
         <p:spPr>
           <a:xfrm>
-            <a:off x="594360" y="2980944"/>
-            <a:ext cx="11002975" cy="347472"/>
+            <a:off x="640080" y="2985516"/>
+            <a:ext cx="10911535" cy="731520"/>
+          </a:xfrm>
+          <a:prstGeom prst="rect">
+            <a:avLst/>
+          </a:prstGeom>
+          <a:noFill/>
+        </p:spPr>
+        <p:txBody>
+          <a:bodyPr wrap="square">
+            <a:spAutoFit/>
+          </a:bodyPr>
+          <a:lstStyle/>
+          <a:p>
+            <a:pPr algn="ctr"/>
+            <a:r>
+              <a:rPr sz="4800" b="1" i="0">
+                <a:solidFill>
+                  <a:srgbClr val="FFFFFF"/>
+                </a:solidFill>
+                <a:latin typeface="Arial"/>
+              </a:rPr>
+              <a:t>こころ　みたす　へいわ</a:t>
+            </a:r>
+          </a:p>
+        </p:txBody>
+      </p:sp>
+      <p:sp>
+        <p:nvSpPr>
+          <p:cNvPr id="5" name="TextBox 4"/>
+          <p:cNvSpPr txBox="1"/>
+          <p:nvPr/>
+        </p:nvSpPr>
+        <p:spPr>
+          <a:xfrm>
+            <a:off x="640080" y="3753612"/>
+            <a:ext cx="10911535" cy="365760"/>
+          </a:xfrm>
+          <a:prstGeom prst="rect">
+            <a:avLst/>
+          </a:prstGeom>
+          <a:noFill/>
+        </p:spPr>
+        <p:txBody>
+          <a:bodyPr wrap="square">
+            <a:spAutoFit/>
+          </a:bodyPr>
+          <a:lstStyle/>
+          <a:p>
+            <a:pPr algn="ctr"/>
+            <a:r>
+              <a:rPr sz="2400" b="0" i="1">
+                <a:solidFill>
+                  <a:srgbClr val="AAAAAA"/>
+                </a:solidFill>
+                <a:latin typeface="Arial"/>
+              </a:rPr>
+              <a:t>kokoro   mitasu  heiwa</a:t>
+            </a:r>
+          </a:p>
+        </p:txBody>
+      </p:sp>
+      <p:sp>
+        <p:nvSpPr>
+          <p:cNvPr id="6" name="TextBox 5"/>
+          <p:cNvSpPr txBox="1"/>
+          <p:nvPr/>
+        </p:nvSpPr>
+        <p:spPr>
+          <a:xfrm>
+            <a:off x="640080" y="4530852"/>
+            <a:ext cx="10911535" cy="310896"/>
           </a:xfrm>
           <a:prstGeom prst="rect">
             <a:avLst/>
@@ -6548,81 +6373,11 @@
             <a:r>
               <a:rPr sz="2000" b="0" i="1">
                 <a:solidFill>
-                  <a:srgbClr val="8C8C8C"/>
-                </a:solidFill>
-                <a:latin typeface="Arial"/>
-              </a:rPr>
-              <a:t/>
-            </a:r>
-          </a:p>
-        </p:txBody>
-      </p:sp>
-      <p:sp>
-        <p:nvSpPr>
-          <p:cNvPr id="5" name="TextBox 4"/>
-          <p:cNvSpPr txBox="1"/>
-          <p:nvPr/>
-        </p:nvSpPr>
-        <p:spPr>
-          <a:xfrm>
-            <a:off x="594360" y="3529584"/>
-            <a:ext cx="11002975" cy="685800"/>
-          </a:xfrm>
-          <a:prstGeom prst="rect">
-            <a:avLst/>
-          </a:prstGeom>
-          <a:noFill/>
-        </p:spPr>
-        <p:txBody>
-          <a:bodyPr wrap="square">
-            <a:spAutoFit/>
-          </a:bodyPr>
-          <a:lstStyle/>
-          <a:p>
-            <a:pPr algn="ctr"/>
-            <a:r>
-              <a:rPr sz="4400" b="1" i="0">
-                <a:solidFill>
-                  <a:srgbClr val="FFFFFF"/>
-                </a:solidFill>
-                <a:latin typeface="Arial"/>
-              </a:rPr>
-              <a:t>こころ　みたす　へいわ</a:t>
-            </a:r>
-          </a:p>
-        </p:txBody>
-      </p:sp>
-      <p:sp>
-        <p:nvSpPr>
-          <p:cNvPr id="6" name="TextBox 5"/>
-          <p:cNvSpPr txBox="1"/>
-          <p:nvPr/>
-        </p:nvSpPr>
-        <p:spPr>
-          <a:xfrm>
-            <a:off x="594360" y="4251960"/>
-            <a:ext cx="11002975" cy="384048"/>
-          </a:xfrm>
-          <a:prstGeom prst="rect">
-            <a:avLst/>
-          </a:prstGeom>
-          <a:noFill/>
-        </p:spPr>
-        <p:txBody>
-          <a:bodyPr wrap="square">
-            <a:spAutoFit/>
-          </a:bodyPr>
-          <a:lstStyle/>
-          <a:p>
-            <a:pPr algn="ctr"/>
-            <a:r>
-              <a:rPr sz="2400" b="0" i="1">
-                <a:solidFill>
-                  <a:srgbClr val="B4B4B4"/>
-                </a:solidFill>
-                <a:latin typeface="Arial"/>
-              </a:rPr>
-              <a:t>kokoro   mitasu  heiwa</a:t>
+                  <a:srgbClr val="828282"/>
+                </a:solidFill>
+                <a:latin typeface="Arial"/>
+              </a:rPr>
+              <a:t>Meu pecado, ó a alegria desse pensamento glorioso</a:t>
             </a:r>
           </a:p>
         </p:txBody>
@@ -6635,8 +6390,8 @@
         </p:nvSpPr>
         <p:spPr>
           <a:xfrm>
-            <a:off x="594360" y="4672584"/>
-            <a:ext cx="11002975" cy="347472"/>
+            <a:off x="640080" y="4896612"/>
+            <a:ext cx="10911535" cy="310896"/>
           </a:xfrm>
           <a:prstGeom prst="rect">
             <a:avLst/>
@@ -6653,11 +6408,11 @@
             <a:r>
               <a:rPr sz="2000" b="0" i="1">
                 <a:solidFill>
-                  <a:srgbClr val="8C8C8C"/>
-                </a:solidFill>
-                <a:latin typeface="Arial"/>
-              </a:rPr>
-              <a:t/>
+                  <a:srgbClr val="828282"/>
+                </a:solidFill>
+                <a:latin typeface="Arial"/>
+              </a:rPr>
+              <a:t>Meu pecado, não em parte, mas todo</a:t>
             </a:r>
           </a:p>
         </p:txBody>

--- a/output_pptx/It_Is_Well_With_My_Soul.pptx
+++ b/output_pptx/It_Is_Well_With_My_Soul.pptx
@@ -4128,6 +4128,76 @@
           </a:p>
         </p:txBody>
       </p:sp>
+      <p:sp>
+        <p:nvSpPr>
+          <p:cNvPr id="4" name="TextBox 3"/>
+          <p:cNvSpPr txBox="1"/>
+          <p:nvPr/>
+        </p:nvSpPr>
+        <p:spPr>
+          <a:xfrm>
+            <a:off x="640080" y="4128516"/>
+            <a:ext cx="10911535" cy="310896"/>
+          </a:xfrm>
+          <a:prstGeom prst="rect">
+            <a:avLst/>
+          </a:prstGeom>
+          <a:noFill/>
+        </p:spPr>
+        <p:txBody>
+          <a:bodyPr wrap="square">
+            <a:spAutoFit/>
+          </a:bodyPr>
+          <a:lstStyle/>
+          <a:p>
+            <a:pPr algn="ctr"/>
+            <a:r>
+              <a:rPr sz="2000" b="0" i="0">
+                <a:solidFill>
+                  <a:srgbClr val="828282"/>
+                </a:solidFill>
+                <a:latin typeface="Arial"/>
+              </a:rPr>
+              <a:t>わが魂よ、主をほめたたえよ</a:t>
+            </a:r>
+          </a:p>
+        </p:txBody>
+      </p:sp>
+      <p:sp>
+        <p:nvSpPr>
+          <p:cNvPr id="5" name="TextBox 4"/>
+          <p:cNvSpPr txBox="1"/>
+          <p:nvPr/>
+        </p:nvSpPr>
+        <p:spPr>
+          <a:xfrm>
+            <a:off x="640080" y="4494276"/>
+            <a:ext cx="10911535" cy="310896"/>
+          </a:xfrm>
+          <a:prstGeom prst="rect">
+            <a:avLst/>
+          </a:prstGeom>
+          <a:noFill/>
+        </p:spPr>
+        <p:txBody>
+          <a:bodyPr wrap="square">
+            <a:spAutoFit/>
+          </a:bodyPr>
+          <a:lstStyle/>
+          <a:p>
+            <a:pPr algn="ctr"/>
+            <a:r>
+              <a:rPr sz="2000" b="0" i="0">
+                <a:solidFill>
+                  <a:srgbClr val="828282"/>
+                </a:solidFill>
+                <a:latin typeface="Arial"/>
+              </a:rPr>
+              <a:t>私の魂は大丈夫です</a:t>
+            </a:r>
+          </a:p>
+        </p:txBody>
+      </p:sp>
     </p:spTree>
   </p:cSld>
   <p:clrMapOvr>
@@ -4224,6 +4294,76 @@
           </a:p>
         </p:txBody>
       </p:sp>
+      <p:sp>
+        <p:nvSpPr>
+          <p:cNvPr id="4" name="TextBox 3"/>
+          <p:cNvSpPr txBox="1"/>
+          <p:nvPr/>
+        </p:nvSpPr>
+        <p:spPr>
+          <a:xfrm>
+            <a:off x="640080" y="4128516"/>
+            <a:ext cx="10911535" cy="310896"/>
+          </a:xfrm>
+          <a:prstGeom prst="rect">
+            <a:avLst/>
+          </a:prstGeom>
+          <a:noFill/>
+        </p:spPr>
+        <p:txBody>
+          <a:bodyPr wrap="square">
+            <a:spAutoFit/>
+          </a:bodyPr>
+          <a:lstStyle/>
+          <a:p>
+            <a:pPr algn="ctr"/>
+            <a:r>
+              <a:rPr sz="2000" b="0" i="0">
+                <a:solidFill>
+                  <a:srgbClr val="828282"/>
+                </a:solidFill>
+                <a:latin typeface="Arial"/>
+              </a:rPr>
+              <a:t>私の魂は大丈夫です</a:t>
+            </a:r>
+          </a:p>
+        </p:txBody>
+      </p:sp>
+      <p:sp>
+        <p:nvSpPr>
+          <p:cNvPr id="5" name="TextBox 4"/>
+          <p:cNvSpPr txBox="1"/>
+          <p:nvPr/>
+        </p:nvSpPr>
+        <p:spPr>
+          <a:xfrm>
+            <a:off x="640080" y="4494276"/>
+            <a:ext cx="10911535" cy="310896"/>
+          </a:xfrm>
+          <a:prstGeom prst="rect">
+            <a:avLst/>
+          </a:prstGeom>
+          <a:noFill/>
+        </p:spPr>
+        <p:txBody>
+          <a:bodyPr wrap="square">
+            <a:spAutoFit/>
+          </a:bodyPr>
+          <a:lstStyle/>
+          <a:p>
+            <a:pPr algn="ctr"/>
+            <a:r>
+              <a:rPr sz="2000" b="0" i="0">
+                <a:solidFill>
+                  <a:srgbClr val="828282"/>
+                </a:solidFill>
+                <a:latin typeface="Arial"/>
+              </a:rPr>
+              <a:t>大丈夫です、私の魂は大丈夫です</a:t>
+            </a:r>
+          </a:p>
+        </p:txBody>
+      </p:sp>
     </p:spTree>
   </p:cSld>
   <p:clrMapOvr>
@@ -4320,6 +4460,76 @@
           </a:p>
         </p:txBody>
       </p:sp>
+      <p:sp>
+        <p:nvSpPr>
+          <p:cNvPr id="4" name="TextBox 3"/>
+          <p:cNvSpPr txBox="1"/>
+          <p:nvPr/>
+        </p:nvSpPr>
+        <p:spPr>
+          <a:xfrm>
+            <a:off x="640080" y="4128516"/>
+            <a:ext cx="10911535" cy="310896"/>
+          </a:xfrm>
+          <a:prstGeom prst="rect">
+            <a:avLst/>
+          </a:prstGeom>
+          <a:noFill/>
+        </p:spPr>
+        <p:txBody>
+          <a:bodyPr wrap="square">
+            <a:spAutoFit/>
+          </a:bodyPr>
+          <a:lstStyle/>
+          <a:p>
+            <a:pPr algn="ctr"/>
+            <a:r>
+              <a:rPr sz="2000" b="0" i="0">
+                <a:solidFill>
+                  <a:srgbClr val="828282"/>
+                </a:solidFill>
+                <a:latin typeface="Arial"/>
+              </a:rPr>
+              <a:t>主よ、信仰が見ることとなる日を速めてください</a:t>
+            </a:r>
+          </a:p>
+        </p:txBody>
+      </p:sp>
+      <p:sp>
+        <p:nvSpPr>
+          <p:cNvPr id="5" name="TextBox 4"/>
+          <p:cNvSpPr txBox="1"/>
+          <p:nvPr/>
+        </p:nvSpPr>
+        <p:spPr>
+          <a:xfrm>
+            <a:off x="640080" y="4494276"/>
+            <a:ext cx="10911535" cy="310896"/>
+          </a:xfrm>
+          <a:prstGeom prst="rect">
+            <a:avLst/>
+          </a:prstGeom>
+          <a:noFill/>
+        </p:spPr>
+        <p:txBody>
+          <a:bodyPr wrap="square">
+            <a:spAutoFit/>
+          </a:bodyPr>
+          <a:lstStyle/>
+          <a:p>
+            <a:pPr algn="ctr"/>
+            <a:r>
+              <a:rPr sz="2000" b="0" i="0">
+                <a:solidFill>
+                  <a:srgbClr val="828282"/>
+                </a:solidFill>
+                <a:latin typeface="Arial"/>
+              </a:rPr>
+              <a:t>雲は巻き上がり、ラッパが鳴り響く</a:t>
+            </a:r>
+          </a:p>
+        </p:txBody>
+      </p:sp>
     </p:spTree>
   </p:cSld>
   <p:clrMapOvr>
@@ -5679,6 +5889,41 @@
                 <a:latin typeface="Arial"/>
               </a:rPr>
               <a:t>Está bem, está bem com a minha alma</a:t>
+            </a:r>
+          </a:p>
+        </p:txBody>
+      </p:sp>
+      <p:sp>
+        <p:nvSpPr>
+          <p:cNvPr id="3" name="TextBox 2"/>
+          <p:cNvSpPr txBox="1"/>
+          <p:nvPr/>
+        </p:nvSpPr>
+        <p:spPr>
+          <a:xfrm>
+            <a:off x="640080" y="3845052"/>
+            <a:ext cx="10911535" cy="310896"/>
+          </a:xfrm>
+          <a:prstGeom prst="rect">
+            <a:avLst/>
+          </a:prstGeom>
+          <a:noFill/>
+        </p:spPr>
+        <p:txBody>
+          <a:bodyPr wrap="square">
+            <a:spAutoFit/>
+          </a:bodyPr>
+          <a:lstStyle/>
+          <a:p>
+            <a:pPr algn="ctr"/>
+            <a:r>
+              <a:rPr sz="2000" b="0" i="0">
+                <a:solidFill>
+                  <a:srgbClr val="828282"/>
+                </a:solidFill>
+                <a:latin typeface="Arial"/>
+              </a:rPr>
+              <a:t>大丈夫です、私の魂は大丈夫です</a:t>
             </a:r>
           </a:p>
         </p:txBody>
